--- a/Presentations/Computer Vision – Module 4 .pptx
+++ b/Presentations/Computer Vision – Module 4 .pptx
@@ -5,10 +5,10 @@
     <p:sldMasterId id="2147483648" r:id="rId1"/>
   </p:sldMasterIdLst>
   <p:notesMasterIdLst>
-    <p:notesMasterId r:id="rId14"/>
+    <p:notesMasterId r:id="rId34"/>
   </p:notesMasterIdLst>
   <p:handoutMasterIdLst>
-    <p:handoutMasterId r:id="rId15"/>
+    <p:handoutMasterId r:id="rId35"/>
   </p:handoutMasterIdLst>
   <p:sldIdLst>
     <p:sldId id="256" r:id="rId2"/>
@@ -23,6 +23,26 @@
     <p:sldId id="283" r:id="rId11"/>
     <p:sldId id="284" r:id="rId12"/>
     <p:sldId id="285" r:id="rId13"/>
+    <p:sldId id="355" r:id="rId14"/>
+    <p:sldId id="356" r:id="rId15"/>
+    <p:sldId id="357" r:id="rId16"/>
+    <p:sldId id="358" r:id="rId17"/>
+    <p:sldId id="359" r:id="rId18"/>
+    <p:sldId id="360" r:id="rId19"/>
+    <p:sldId id="361" r:id="rId20"/>
+    <p:sldId id="362" r:id="rId21"/>
+    <p:sldId id="363" r:id="rId22"/>
+    <p:sldId id="364" r:id="rId23"/>
+    <p:sldId id="366" r:id="rId24"/>
+    <p:sldId id="365" r:id="rId25"/>
+    <p:sldId id="367" r:id="rId26"/>
+    <p:sldId id="368" r:id="rId27"/>
+    <p:sldId id="369" r:id="rId28"/>
+    <p:sldId id="370" r:id="rId29"/>
+    <p:sldId id="371" r:id="rId30"/>
+    <p:sldId id="372" r:id="rId31"/>
+    <p:sldId id="373" r:id="rId32"/>
+    <p:sldId id="374" r:id="rId33"/>
   </p:sldIdLst>
   <p:sldSz cx="12192000" cy="6858000"/>
   <p:notesSz cx="6858000" cy="9144000"/>
@@ -1058,7 +1078,7 @@
           <a:p>
             <a:fld id="{762B48F5-BACC-47D6-A0F7-82FBF9C6BC85}" type="datetimeFigureOut">
               <a:rPr lang="en-US"/>
-              <a:t>3/17/2026</a:t>
+              <a:t>4/16/2026</a:t>
             </a:fld>
             <a:endParaRPr/>
           </a:p>
@@ -1223,7 +1243,7 @@
           <a:p>
             <a:fld id="{0CB1CD00-5424-4675-AB18-2C419B060449}" type="datetimeFigureOut">
               <a:rPr lang="en-US"/>
-              <a:t>3/17/2026</a:t>
+              <a:t>4/16/2026</a:t>
             </a:fld>
             <a:endParaRPr/>
           </a:p>
@@ -1868,7 +1888,7 @@
           <a:p>
             <a:fld id="{37CC0096-1860-4642-9CD2-0079EA5E7CD1}" type="datetimeFigureOut">
               <a:rPr lang="en-US" smtClean="0"/>
-              <a:t>3/17/2026</a:t>
+              <a:t>4/16/2026</a:t>
             </a:fld>
             <a:endParaRPr lang="en-US"/>
           </a:p>
@@ -2047,7 +2067,7 @@
           <a:p>
             <a:fld id="{37CC0096-1860-4642-9CD2-0079EA5E7CD1}" type="datetimeFigureOut">
               <a:rPr lang="en-US" smtClean="0"/>
-              <a:t>3/17/2026</a:t>
+              <a:t>4/16/2026</a:t>
             </a:fld>
             <a:endParaRPr lang="en-US"/>
           </a:p>
@@ -2220,7 +2240,7 @@
           <a:p>
             <a:fld id="{37CC0096-1860-4642-9CD2-0079EA5E7CD1}" type="datetimeFigureOut">
               <a:rPr lang="en-US" smtClean="0"/>
-              <a:t>3/17/2026</a:t>
+              <a:t>4/16/2026</a:t>
             </a:fld>
             <a:endParaRPr lang="en-US"/>
           </a:p>
@@ -2653,7 +2673,7 @@
           <a:p>
             <a:fld id="{37CC0096-1860-4642-9CD2-0079EA5E7CD1}" type="datetimeFigureOut">
               <a:rPr lang="en-US" smtClean="0"/>
-              <a:t>3/17/2026</a:t>
+              <a:t>4/16/2026</a:t>
             </a:fld>
             <a:endParaRPr lang="en-US"/>
           </a:p>
@@ -3092,7 +3112,7 @@
           <a:p>
             <a:fld id="{37CC0096-1860-4642-9CD2-0079EA5E7CD1}" type="datetimeFigureOut">
               <a:rPr lang="en-US" smtClean="0"/>
-              <a:t>3/17/2026</a:t>
+              <a:t>4/16/2026</a:t>
             </a:fld>
             <a:endParaRPr lang="en-US"/>
           </a:p>
@@ -3209,7 +3229,7 @@
           <a:p>
             <a:fld id="{37CC0096-1860-4642-9CD2-0079EA5E7CD1}" type="datetimeFigureOut">
               <a:rPr lang="en-US" smtClean="0"/>
-              <a:t>3/17/2026</a:t>
+              <a:t>4/16/2026</a:t>
             </a:fld>
             <a:endParaRPr lang="en-US"/>
           </a:p>
@@ -3304,7 +3324,7 @@
           <a:p>
             <a:fld id="{37CC0096-1860-4642-9CD2-0079EA5E7CD1}" type="datetimeFigureOut">
               <a:rPr lang="en-US" smtClean="0"/>
-              <a:t>3/17/2026</a:t>
+              <a:t>4/16/2026</a:t>
             </a:fld>
             <a:endParaRPr lang="en-US"/>
           </a:p>
@@ -3588,7 +3608,7 @@
           <a:p>
             <a:fld id="{37CC0096-1860-4642-9CD2-0079EA5E7CD1}" type="datetimeFigureOut">
               <a:rPr lang="en-US" smtClean="0"/>
-              <a:t>3/17/2026</a:t>
+              <a:t>4/16/2026</a:t>
             </a:fld>
             <a:endParaRPr lang="en-US"/>
           </a:p>
@@ -3899,7 +3919,7 @@
           <a:p>
             <a:fld id="{37CC0096-1860-4642-9CD2-0079EA5E7CD1}" type="datetimeFigureOut">
               <a:rPr lang="en-US" smtClean="0"/>
-              <a:t>3/17/2026</a:t>
+              <a:t>4/16/2026</a:t>
             </a:fld>
             <a:endParaRPr lang="en-US"/>
           </a:p>
@@ -4131,7 +4151,7 @@
             <a:fld id="{37CC0096-1860-4642-9CD2-0079EA5E7CD1}" type="datetimeFigureOut">
               <a:rPr lang="en-US" smtClean="0"/>
               <a:pPr/>
-              <a:t>3/17/2026</a:t>
+              <a:t>4/16/2026</a:t>
             </a:fld>
             <a:endParaRPr lang="en-US"/>
           </a:p>
@@ -5057,6 +5077,964 @@
 </p:sld>
 </file>
 
+<file path=ppt/slides/slide13.xml><?xml version="1.0" encoding="utf-8"?>
+<p:sld xmlns:a="http://schemas.openxmlformats.org/drawingml/2006/main" xmlns:r="http://schemas.openxmlformats.org/officeDocument/2006/relationships" xmlns:p="http://schemas.openxmlformats.org/presentationml/2006/main">
+  <p:cSld>
+    <p:spTree>
+      <p:nvGrpSpPr>
+        <p:cNvPr id="1" name=""/>
+        <p:cNvGrpSpPr/>
+        <p:nvPr/>
+      </p:nvGrpSpPr>
+      <p:grpSpPr>
+        <a:xfrm>
+          <a:off x="0" y="0"/>
+          <a:ext cx="0" cy="0"/>
+          <a:chOff x="0" y="0"/>
+          <a:chExt cx="0" cy="0"/>
+        </a:xfrm>
+      </p:grpSpPr>
+      <p:sp>
+        <p:nvSpPr>
+          <p:cNvPr id="2" name="Title 1">
+            <a:extLst>
+              <a:ext uri="{FF2B5EF4-FFF2-40B4-BE49-F238E27FC236}">
+                <a16:creationId xmlns:a16="http://schemas.microsoft.com/office/drawing/2014/main" id="{D09192AA-1055-9884-9E8E-41DC759E3E40}"/>
+              </a:ext>
+            </a:extLst>
+          </p:cNvPr>
+          <p:cNvSpPr>
+            <a:spLocks noGrp="1"/>
+          </p:cNvSpPr>
+          <p:nvPr>
+            <p:ph type="title"/>
+          </p:nvPr>
+        </p:nvSpPr>
+        <p:spPr/>
+        <p:txBody>
+          <a:bodyPr/>
+          <a:lstStyle/>
+          <a:p>
+            <a:r>
+              <a:rPr lang="en-US" dirty="0"/>
+              <a:t>Graph Cut (Energy Minimization Segmentation)</a:t>
+            </a:r>
+            <a:endParaRPr lang="en-IN" dirty="0"/>
+          </a:p>
+        </p:txBody>
+      </p:sp>
+      <p:sp>
+        <p:nvSpPr>
+          <p:cNvPr id="3" name="Content Placeholder 2">
+            <a:extLst>
+              <a:ext uri="{FF2B5EF4-FFF2-40B4-BE49-F238E27FC236}">
+                <a16:creationId xmlns:a16="http://schemas.microsoft.com/office/drawing/2014/main" id="{389D2AEA-A38C-476F-5A82-B90CEC05F34E}"/>
+              </a:ext>
+            </a:extLst>
+          </p:cNvPr>
+          <p:cNvSpPr>
+            <a:spLocks noGrp="1"/>
+          </p:cNvSpPr>
+          <p:nvPr>
+            <p:ph idx="1"/>
+          </p:nvPr>
+        </p:nvSpPr>
+        <p:spPr/>
+        <p:txBody>
+          <a:bodyPr/>
+          <a:lstStyle/>
+          <a:p>
+            <a:r>
+              <a:rPr lang="en-US" dirty="0"/>
+              <a:t>Convert image into a </a:t>
+            </a:r>
+            <a:r>
+              <a:rPr lang="en-US" b="1" dirty="0"/>
+              <a:t>graph</a:t>
+            </a:r>
+            <a:r>
+              <a:rPr lang="en-US" dirty="0"/>
+              <a:t> and cut it optimally</a:t>
+            </a:r>
+          </a:p>
+          <a:p>
+            <a:r>
+              <a:rPr lang="en-US" dirty="0"/>
+              <a:t>Imagine:</a:t>
+            </a:r>
+          </a:p>
+          <a:p>
+            <a:pPr lvl="1"/>
+            <a:r>
+              <a:rPr lang="en-US" dirty="0"/>
+              <a:t>Every pixel is a </a:t>
+            </a:r>
+            <a:r>
+              <a:rPr lang="en-US" b="1" dirty="0"/>
+              <a:t>node</a:t>
+            </a:r>
+          </a:p>
+          <a:p>
+            <a:pPr lvl="1"/>
+            <a:r>
+              <a:rPr lang="en-US" dirty="0"/>
+              <a:t>Similar pixels are </a:t>
+            </a:r>
+            <a:r>
+              <a:rPr lang="en-US" b="1" dirty="0"/>
+              <a:t>strongly connected</a:t>
+            </a:r>
+          </a:p>
+          <a:p>
+            <a:pPr lvl="1"/>
+            <a:r>
+              <a:rPr lang="en-US" dirty="0"/>
+              <a:t>Different pixels are </a:t>
+            </a:r>
+            <a:r>
+              <a:rPr lang="en-US" b="1" dirty="0"/>
+              <a:t>weakly connected</a:t>
+            </a:r>
+            <a:endParaRPr lang="en-US" dirty="0"/>
+          </a:p>
+          <a:p>
+            <a:r>
+              <a:rPr lang="en-US" dirty="0"/>
+              <a:t>Now:</a:t>
+            </a:r>
+          </a:p>
+          <a:p>
+            <a:pPr lvl="1"/>
+            <a:r>
+              <a:rPr lang="en-US" dirty="0"/>
+              <a:t>If you “cut” the weakest connections</a:t>
+            </a:r>
+          </a:p>
+          <a:p>
+            <a:pPr lvl="1"/>
+            <a:r>
+              <a:rPr lang="en-US" dirty="0"/>
+              <a:t>The image splits into regions</a:t>
+            </a:r>
+          </a:p>
+          <a:p>
+            <a:endParaRPr lang="en-IN" dirty="0"/>
+          </a:p>
+        </p:txBody>
+      </p:sp>
+    </p:spTree>
+    <p:extLst>
+      <p:ext uri="{BB962C8B-B14F-4D97-AF65-F5344CB8AC3E}">
+        <p14:creationId xmlns:p14="http://schemas.microsoft.com/office/powerpoint/2010/main" val="365187316"/>
+      </p:ext>
+    </p:extLst>
+  </p:cSld>
+  <p:clrMapOvr>
+    <a:masterClrMapping/>
+  </p:clrMapOvr>
+</p:sld>
+</file>
+
+<file path=ppt/slides/slide14.xml><?xml version="1.0" encoding="utf-8"?>
+<p:sld xmlns:a="http://schemas.openxmlformats.org/drawingml/2006/main" xmlns:r="http://schemas.openxmlformats.org/officeDocument/2006/relationships" xmlns:p="http://schemas.openxmlformats.org/presentationml/2006/main">
+  <p:cSld>
+    <p:spTree>
+      <p:nvGrpSpPr>
+        <p:cNvPr id="1" name=""/>
+        <p:cNvGrpSpPr/>
+        <p:nvPr/>
+      </p:nvGrpSpPr>
+      <p:grpSpPr>
+        <a:xfrm>
+          <a:off x="0" y="0"/>
+          <a:ext cx="0" cy="0"/>
+          <a:chOff x="0" y="0"/>
+          <a:chExt cx="0" cy="0"/>
+        </a:xfrm>
+      </p:grpSpPr>
+      <p:sp>
+        <p:nvSpPr>
+          <p:cNvPr id="2" name="Title 1">
+            <a:extLst>
+              <a:ext uri="{FF2B5EF4-FFF2-40B4-BE49-F238E27FC236}">
+                <a16:creationId xmlns:a16="http://schemas.microsoft.com/office/drawing/2014/main" id="{6E89C8D5-0E8A-1AFA-6106-4F70146C0C01}"/>
+              </a:ext>
+            </a:extLst>
+          </p:cNvPr>
+          <p:cNvSpPr>
+            <a:spLocks noGrp="1"/>
+          </p:cNvSpPr>
+          <p:nvPr>
+            <p:ph type="title"/>
+          </p:nvPr>
+        </p:nvSpPr>
+        <p:spPr/>
+        <p:txBody>
+          <a:bodyPr/>
+          <a:lstStyle/>
+          <a:p>
+            <a:r>
+              <a:rPr lang="en-IN" dirty="0"/>
+              <a:t>Graph Representation</a:t>
+            </a:r>
+          </a:p>
+        </p:txBody>
+      </p:sp>
+      <p:sp>
+        <p:nvSpPr>
+          <p:cNvPr id="3" name="Content Placeholder 2">
+            <a:extLst>
+              <a:ext uri="{FF2B5EF4-FFF2-40B4-BE49-F238E27FC236}">
+                <a16:creationId xmlns:a16="http://schemas.microsoft.com/office/drawing/2014/main" id="{36AF7360-525A-24F6-1C98-4CE35AF17932}"/>
+              </a:ext>
+            </a:extLst>
+          </p:cNvPr>
+          <p:cNvSpPr>
+            <a:spLocks noGrp="1"/>
+          </p:cNvSpPr>
+          <p:nvPr>
+            <p:ph idx="1"/>
+          </p:nvPr>
+        </p:nvSpPr>
+        <p:spPr/>
+        <p:txBody>
+          <a:bodyPr>
+            <a:normAutofit fontScale="92500" lnSpcReduction="10000"/>
+          </a:bodyPr>
+          <a:lstStyle/>
+          <a:p>
+            <a:r>
+              <a:rPr lang="en-US" b="1" dirty="0"/>
+              <a:t>Nodes</a:t>
+            </a:r>
+          </a:p>
+          <a:p>
+            <a:pPr lvl="1"/>
+            <a:r>
+              <a:rPr lang="en-US" dirty="0"/>
+              <a:t>Each pixel = node </a:t>
+            </a:r>
+          </a:p>
+          <a:p>
+            <a:pPr lvl="1"/>
+            <a:r>
+              <a:rPr lang="en-US" dirty="0"/>
+              <a:t>Plus two special nodes: </a:t>
+            </a:r>
+          </a:p>
+          <a:p>
+            <a:pPr lvl="2"/>
+            <a:r>
+              <a:rPr lang="en-US" b="1" dirty="0"/>
+              <a:t>Source (S)</a:t>
+            </a:r>
+            <a:r>
+              <a:rPr lang="en-US" dirty="0"/>
+              <a:t> → foreground </a:t>
+            </a:r>
+          </a:p>
+          <a:p>
+            <a:pPr lvl="2"/>
+            <a:r>
+              <a:rPr lang="en-US" b="1" dirty="0"/>
+              <a:t>Sink (T)</a:t>
+            </a:r>
+            <a:r>
+              <a:rPr lang="en-US" dirty="0"/>
+              <a:t> → background</a:t>
+            </a:r>
+          </a:p>
+          <a:p>
+            <a:r>
+              <a:rPr lang="en-US" b="1" dirty="0"/>
+              <a:t> N-links (Neighbor links)</a:t>
+            </a:r>
+          </a:p>
+          <a:p>
+            <a:pPr lvl="1"/>
+            <a:r>
+              <a:rPr lang="en-US" dirty="0"/>
+              <a:t>Between pixels</a:t>
+            </a:r>
+          </a:p>
+          <a:p>
+            <a:pPr lvl="2"/>
+            <a:r>
+              <a:rPr lang="en-US" dirty="0"/>
+              <a:t>Strong if similar </a:t>
+            </a:r>
+          </a:p>
+          <a:p>
+            <a:pPr lvl="2"/>
+            <a:r>
+              <a:rPr lang="en-US" dirty="0"/>
+              <a:t>Weak if different </a:t>
+            </a:r>
+          </a:p>
+          <a:p>
+            <a:r>
+              <a:rPr lang="en-US" b="1" dirty="0"/>
+              <a:t>T-links (Terminal links)</a:t>
+            </a:r>
+          </a:p>
+          <a:p>
+            <a:pPr lvl="1"/>
+            <a:r>
+              <a:rPr lang="en-US" dirty="0"/>
+              <a:t>Pixel → Source / Sink</a:t>
+            </a:r>
+          </a:p>
+          <a:p>
+            <a:pPr lvl="1"/>
+            <a:r>
+              <a:rPr lang="en-US" dirty="0"/>
+              <a:t>Probability of being foreground/background</a:t>
+            </a:r>
+          </a:p>
+          <a:p>
+            <a:endParaRPr lang="en-IN" dirty="0"/>
+          </a:p>
+        </p:txBody>
+      </p:sp>
+    </p:spTree>
+    <p:extLst>
+      <p:ext uri="{BB962C8B-B14F-4D97-AF65-F5344CB8AC3E}">
+        <p14:creationId xmlns:p14="http://schemas.microsoft.com/office/powerpoint/2010/main" val="2857753635"/>
+      </p:ext>
+    </p:extLst>
+  </p:cSld>
+  <p:clrMapOvr>
+    <a:masterClrMapping/>
+  </p:clrMapOvr>
+</p:sld>
+</file>
+
+<file path=ppt/slides/slide15.xml><?xml version="1.0" encoding="utf-8"?>
+<p:sld xmlns:a="http://schemas.openxmlformats.org/drawingml/2006/main" xmlns:r="http://schemas.openxmlformats.org/officeDocument/2006/relationships" xmlns:p="http://schemas.openxmlformats.org/presentationml/2006/main">
+  <p:cSld>
+    <p:spTree>
+      <p:nvGrpSpPr>
+        <p:cNvPr id="1" name=""/>
+        <p:cNvGrpSpPr/>
+        <p:nvPr/>
+      </p:nvGrpSpPr>
+      <p:grpSpPr>
+        <a:xfrm>
+          <a:off x="0" y="0"/>
+          <a:ext cx="0" cy="0"/>
+          <a:chOff x="0" y="0"/>
+          <a:chExt cx="0" cy="0"/>
+        </a:xfrm>
+      </p:grpSpPr>
+      <p:sp>
+        <p:nvSpPr>
+          <p:cNvPr id="2" name="Title 1">
+            <a:extLst>
+              <a:ext uri="{FF2B5EF4-FFF2-40B4-BE49-F238E27FC236}">
+                <a16:creationId xmlns:a16="http://schemas.microsoft.com/office/drawing/2014/main" id="{9691DE7B-183E-2252-3146-B33476A4EB6D}"/>
+              </a:ext>
+            </a:extLst>
+          </p:cNvPr>
+          <p:cNvSpPr>
+            <a:spLocks noGrp="1"/>
+          </p:cNvSpPr>
+          <p:nvPr>
+            <p:ph type="title"/>
+          </p:nvPr>
+        </p:nvSpPr>
+        <p:spPr/>
+        <p:txBody>
+          <a:bodyPr/>
+          <a:lstStyle/>
+          <a:p>
+            <a:endParaRPr lang="en-IN"/>
+          </a:p>
+        </p:txBody>
+      </p:sp>
+      <p:pic>
+        <p:nvPicPr>
+          <p:cNvPr id="5" name="Content Placeholder 4">
+            <a:extLst>
+              <a:ext uri="{FF2B5EF4-FFF2-40B4-BE49-F238E27FC236}">
+                <a16:creationId xmlns:a16="http://schemas.microsoft.com/office/drawing/2014/main" id="{CF4CC2A7-C4CF-75A8-4BCA-9CDB20C4CD48}"/>
+              </a:ext>
+            </a:extLst>
+          </p:cNvPr>
+          <p:cNvPicPr>
+            <a:picLocks noGrp="1" noChangeAspect="1"/>
+          </p:cNvPicPr>
+          <p:nvPr>
+            <p:ph idx="1"/>
+          </p:nvPr>
+        </p:nvPicPr>
+        <p:blipFill>
+          <a:blip r:embed="rId2">
+            <a:extLst>
+              <a:ext uri="{28A0092B-C50C-407E-A947-70E740481C1C}">
+                <a14:useLocalDpi xmlns:a14="http://schemas.microsoft.com/office/drawing/2010/main" val="0"/>
+              </a:ext>
+            </a:extLst>
+          </a:blip>
+          <a:stretch>
+            <a:fillRect/>
+          </a:stretch>
+        </p:blipFill>
+        <p:spPr>
+          <a:xfrm>
+            <a:off x="5770270" y="1988840"/>
+            <a:ext cx="4908146" cy="4267200"/>
+          </a:xfrm>
+          <a:prstGeom prst="rect">
+            <a:avLst/>
+          </a:prstGeom>
+        </p:spPr>
+      </p:pic>
+      <p:sp>
+        <p:nvSpPr>
+          <p:cNvPr id="7" name="TextBox 6">
+            <a:extLst>
+              <a:ext uri="{FF2B5EF4-FFF2-40B4-BE49-F238E27FC236}">
+                <a16:creationId xmlns:a16="http://schemas.microsoft.com/office/drawing/2014/main" id="{D7D4795C-CDBC-BA42-9886-05F84CEEDD10}"/>
+              </a:ext>
+            </a:extLst>
+          </p:cNvPr>
+          <p:cNvSpPr txBox="1"/>
+          <p:nvPr/>
+        </p:nvSpPr>
+        <p:spPr>
+          <a:xfrm>
+            <a:off x="1343472" y="1934704"/>
+            <a:ext cx="6096000" cy="1477328"/>
+          </a:xfrm>
+          <a:prstGeom prst="rect">
+            <a:avLst/>
+          </a:prstGeom>
+          <a:noFill/>
+        </p:spPr>
+        <p:txBody>
+          <a:bodyPr wrap="square">
+            <a:spAutoFit/>
+          </a:bodyPr>
+          <a:lstStyle/>
+          <a:p>
+            <a:pPr>
+              <a:buNone/>
+            </a:pPr>
+            <a:r>
+              <a:rPr lang="en-US" b="1" dirty="0"/>
+              <a:t>WHAT IS A “CUT”?</a:t>
+            </a:r>
+          </a:p>
+          <a:p>
+            <a:pPr>
+              <a:buNone/>
+            </a:pPr>
+            <a:r>
+              <a:rPr lang="en-US" dirty="0"/>
+              <a:t>A cut divides graph into:</a:t>
+            </a:r>
+          </a:p>
+          <a:p>
+            <a:pPr>
+              <a:buNone/>
+            </a:pPr>
+            <a:endParaRPr lang="en-US" dirty="0"/>
+          </a:p>
+          <a:p>
+            <a:pPr>
+              <a:buFont typeface="Arial" panose="020B0604020202020204" pitchFamily="34" charset="0"/>
+              <a:buChar char="•"/>
+            </a:pPr>
+            <a:r>
+              <a:rPr lang="en-US" dirty="0"/>
+              <a:t>Foreground group </a:t>
+            </a:r>
+          </a:p>
+          <a:p>
+            <a:pPr>
+              <a:buFont typeface="Arial" panose="020B0604020202020204" pitchFamily="34" charset="0"/>
+              <a:buChar char="•"/>
+            </a:pPr>
+            <a:r>
+              <a:rPr lang="en-US" dirty="0"/>
+              <a:t>Background group</a:t>
+            </a:r>
+          </a:p>
+        </p:txBody>
+      </p:sp>
+    </p:spTree>
+    <p:extLst>
+      <p:ext uri="{BB962C8B-B14F-4D97-AF65-F5344CB8AC3E}">
+        <p14:creationId xmlns:p14="http://schemas.microsoft.com/office/powerpoint/2010/main" val="2621638610"/>
+      </p:ext>
+    </p:extLst>
+  </p:cSld>
+  <p:clrMapOvr>
+    <a:masterClrMapping/>
+  </p:clrMapOvr>
+</p:sld>
+</file>
+
+<file path=ppt/slides/slide16.xml><?xml version="1.0" encoding="utf-8"?>
+<p:sld xmlns:a="http://schemas.openxmlformats.org/drawingml/2006/main" xmlns:r="http://schemas.openxmlformats.org/officeDocument/2006/relationships" xmlns:p="http://schemas.openxmlformats.org/presentationml/2006/main">
+  <p:cSld>
+    <p:spTree>
+      <p:nvGrpSpPr>
+        <p:cNvPr id="1" name=""/>
+        <p:cNvGrpSpPr/>
+        <p:nvPr/>
+      </p:nvGrpSpPr>
+      <p:grpSpPr>
+        <a:xfrm>
+          <a:off x="0" y="0"/>
+          <a:ext cx="0" cy="0"/>
+          <a:chOff x="0" y="0"/>
+          <a:chExt cx="0" cy="0"/>
+        </a:xfrm>
+      </p:grpSpPr>
+      <p:sp>
+        <p:nvSpPr>
+          <p:cNvPr id="2" name="Title 1">
+            <a:extLst>
+              <a:ext uri="{FF2B5EF4-FFF2-40B4-BE49-F238E27FC236}">
+                <a16:creationId xmlns:a16="http://schemas.microsoft.com/office/drawing/2014/main" id="{1DD81FE9-8F40-8849-43CA-B6AC3029C46C}"/>
+              </a:ext>
+            </a:extLst>
+          </p:cNvPr>
+          <p:cNvSpPr>
+            <a:spLocks noGrp="1"/>
+          </p:cNvSpPr>
+          <p:nvPr>
+            <p:ph type="title"/>
+          </p:nvPr>
+        </p:nvSpPr>
+        <p:spPr/>
+        <p:txBody>
+          <a:bodyPr/>
+          <a:lstStyle/>
+          <a:p>
+            <a:r>
+              <a:rPr lang="en-IN" dirty="0"/>
+              <a:t>Steps</a:t>
+            </a:r>
+          </a:p>
+        </p:txBody>
+      </p:sp>
+      <p:sp>
+        <p:nvSpPr>
+          <p:cNvPr id="3" name="Content Placeholder 2">
+            <a:extLst>
+              <a:ext uri="{FF2B5EF4-FFF2-40B4-BE49-F238E27FC236}">
+                <a16:creationId xmlns:a16="http://schemas.microsoft.com/office/drawing/2014/main" id="{5E5CA577-6B2C-6DBE-1319-4AC612E302D7}"/>
+              </a:ext>
+            </a:extLst>
+          </p:cNvPr>
+          <p:cNvSpPr>
+            <a:spLocks noGrp="1"/>
+          </p:cNvSpPr>
+          <p:nvPr>
+            <p:ph idx="1"/>
+          </p:nvPr>
+        </p:nvSpPr>
+        <p:spPr/>
+        <p:txBody>
+          <a:bodyPr>
+            <a:normAutofit/>
+          </a:bodyPr>
+          <a:lstStyle/>
+          <a:p>
+            <a:r>
+              <a:rPr lang="en-US" b="1" dirty="0"/>
+              <a:t>Step 1: Assign probabilities</a:t>
+            </a:r>
+          </a:p>
+          <a:p>
+            <a:pPr lvl="1"/>
+            <a:r>
+              <a:rPr lang="en-US" dirty="0"/>
+              <a:t>Each pixel:</a:t>
+            </a:r>
+          </a:p>
+          <a:p>
+            <a:pPr lvl="2"/>
+            <a:r>
+              <a:rPr lang="en-US" dirty="0"/>
+              <a:t>Likely foreground </a:t>
+            </a:r>
+          </a:p>
+          <a:p>
+            <a:pPr lvl="2"/>
+            <a:r>
+              <a:rPr lang="en-US" dirty="0"/>
+              <a:t>Likely background </a:t>
+            </a:r>
+          </a:p>
+          <a:p>
+            <a:pPr lvl="2"/>
+            <a:endParaRPr lang="en-US" dirty="0"/>
+          </a:p>
+          <a:p>
+            <a:r>
+              <a:rPr lang="en-US" b="1" dirty="0"/>
+              <a:t>Step 2: Build graph</a:t>
+            </a:r>
+          </a:p>
+          <a:p>
+            <a:pPr lvl="1"/>
+            <a:r>
+              <a:rPr lang="en-US" dirty="0"/>
+              <a:t>Add nodes </a:t>
+            </a:r>
+          </a:p>
+          <a:p>
+            <a:pPr lvl="1"/>
+            <a:r>
+              <a:rPr lang="en-US" dirty="0"/>
+              <a:t>Add edges with weights </a:t>
+            </a:r>
+          </a:p>
+          <a:p>
+            <a:endParaRPr lang="en-US" dirty="0"/>
+          </a:p>
+          <a:p>
+            <a:endParaRPr lang="en-IN" dirty="0"/>
+          </a:p>
+        </p:txBody>
+      </p:sp>
+    </p:spTree>
+    <p:extLst>
+      <p:ext uri="{BB962C8B-B14F-4D97-AF65-F5344CB8AC3E}">
+        <p14:creationId xmlns:p14="http://schemas.microsoft.com/office/powerpoint/2010/main" val="2667014559"/>
+      </p:ext>
+    </p:extLst>
+  </p:cSld>
+  <p:clrMapOvr>
+    <a:masterClrMapping/>
+  </p:clrMapOvr>
+</p:sld>
+</file>
+
+<file path=ppt/slides/slide17.xml><?xml version="1.0" encoding="utf-8"?>
+<p:sld xmlns:a="http://schemas.openxmlformats.org/drawingml/2006/main" xmlns:r="http://schemas.openxmlformats.org/officeDocument/2006/relationships" xmlns:p="http://schemas.openxmlformats.org/presentationml/2006/main">
+  <p:cSld>
+    <p:spTree>
+      <p:nvGrpSpPr>
+        <p:cNvPr id="1" name=""/>
+        <p:cNvGrpSpPr/>
+        <p:nvPr/>
+      </p:nvGrpSpPr>
+      <p:grpSpPr>
+        <a:xfrm>
+          <a:off x="0" y="0"/>
+          <a:ext cx="0" cy="0"/>
+          <a:chOff x="0" y="0"/>
+          <a:chExt cx="0" cy="0"/>
+        </a:xfrm>
+      </p:grpSpPr>
+      <p:sp>
+        <p:nvSpPr>
+          <p:cNvPr id="2" name="Title 1">
+            <a:extLst>
+              <a:ext uri="{FF2B5EF4-FFF2-40B4-BE49-F238E27FC236}">
+                <a16:creationId xmlns:a16="http://schemas.microsoft.com/office/drawing/2014/main" id="{32E81DAA-1038-EFC9-8752-AA5E5BE6942E}"/>
+              </a:ext>
+            </a:extLst>
+          </p:cNvPr>
+          <p:cNvSpPr>
+            <a:spLocks noGrp="1"/>
+          </p:cNvSpPr>
+          <p:nvPr>
+            <p:ph type="title"/>
+          </p:nvPr>
+        </p:nvSpPr>
+        <p:spPr/>
+        <p:txBody>
+          <a:bodyPr/>
+          <a:lstStyle/>
+          <a:p>
+            <a:endParaRPr lang="en-IN"/>
+          </a:p>
+        </p:txBody>
+      </p:sp>
+      <p:sp>
+        <p:nvSpPr>
+          <p:cNvPr id="3" name="Content Placeholder 2">
+            <a:extLst>
+              <a:ext uri="{FF2B5EF4-FFF2-40B4-BE49-F238E27FC236}">
+                <a16:creationId xmlns:a16="http://schemas.microsoft.com/office/drawing/2014/main" id="{0A1E89BD-FFC4-26D2-20A6-60C1BDF17C5E}"/>
+              </a:ext>
+            </a:extLst>
+          </p:cNvPr>
+          <p:cNvSpPr>
+            <a:spLocks noGrp="1"/>
+          </p:cNvSpPr>
+          <p:nvPr>
+            <p:ph idx="1"/>
+          </p:nvPr>
+        </p:nvSpPr>
+        <p:spPr/>
+        <p:txBody>
+          <a:bodyPr/>
+          <a:lstStyle/>
+          <a:p>
+            <a:r>
+              <a:rPr lang="en-US" b="1" dirty="0"/>
+              <a:t>Step 3: Apply Min-Cut / Max-Flow</a:t>
+            </a:r>
+          </a:p>
+          <a:p>
+            <a:pPr lvl="1"/>
+            <a:r>
+              <a:rPr lang="en-US" dirty="0"/>
+              <a:t> Algorithm finds optimal cut</a:t>
+            </a:r>
+          </a:p>
+          <a:p>
+            <a:pPr lvl="1"/>
+            <a:endParaRPr lang="en-US" dirty="0"/>
+          </a:p>
+          <a:p>
+            <a:r>
+              <a:rPr lang="en-US" b="1" dirty="0"/>
+              <a:t>Step 4: Result</a:t>
+            </a:r>
+          </a:p>
+          <a:p>
+            <a:pPr lvl="1"/>
+            <a:r>
+              <a:rPr lang="en-US" dirty="0"/>
+              <a:t>Pixels connected to Source → Foreground </a:t>
+            </a:r>
+          </a:p>
+          <a:p>
+            <a:pPr lvl="1"/>
+            <a:r>
+              <a:rPr lang="en-US" dirty="0"/>
+              <a:t>Pixels connected to Sink → Background </a:t>
+            </a:r>
+          </a:p>
+          <a:p>
+            <a:endParaRPr lang="en-IN" dirty="0"/>
+          </a:p>
+        </p:txBody>
+      </p:sp>
+    </p:spTree>
+    <p:extLst>
+      <p:ext uri="{BB962C8B-B14F-4D97-AF65-F5344CB8AC3E}">
+        <p14:creationId xmlns:p14="http://schemas.microsoft.com/office/powerpoint/2010/main" val="1209937049"/>
+      </p:ext>
+    </p:extLst>
+  </p:cSld>
+  <p:clrMapOvr>
+    <a:masterClrMapping/>
+  </p:clrMapOvr>
+</p:sld>
+</file>
+
+<file path=ppt/slides/slide18.xml><?xml version="1.0" encoding="utf-8"?>
+<p:sld xmlns:a="http://schemas.openxmlformats.org/drawingml/2006/main" xmlns:r="http://schemas.openxmlformats.org/officeDocument/2006/relationships" xmlns:p="http://schemas.openxmlformats.org/presentationml/2006/main">
+  <p:cSld>
+    <p:spTree>
+      <p:nvGrpSpPr>
+        <p:cNvPr id="1" name=""/>
+        <p:cNvGrpSpPr/>
+        <p:nvPr/>
+      </p:nvGrpSpPr>
+      <p:grpSpPr>
+        <a:xfrm>
+          <a:off x="0" y="0"/>
+          <a:ext cx="0" cy="0"/>
+          <a:chOff x="0" y="0"/>
+          <a:chExt cx="0" cy="0"/>
+        </a:xfrm>
+      </p:grpSpPr>
+      <p:sp>
+        <p:nvSpPr>
+          <p:cNvPr id="2" name="Title 1">
+            <a:extLst>
+              <a:ext uri="{FF2B5EF4-FFF2-40B4-BE49-F238E27FC236}">
+                <a16:creationId xmlns:a16="http://schemas.microsoft.com/office/drawing/2014/main" id="{60ABBEB6-2F84-77D8-E249-46C601891B99}"/>
+              </a:ext>
+            </a:extLst>
+          </p:cNvPr>
+          <p:cNvSpPr>
+            <a:spLocks noGrp="1"/>
+          </p:cNvSpPr>
+          <p:nvPr>
+            <p:ph type="title"/>
+          </p:nvPr>
+        </p:nvSpPr>
+        <p:spPr/>
+        <p:txBody>
+          <a:bodyPr/>
+          <a:lstStyle/>
+          <a:p>
+            <a:r>
+              <a:rPr lang="en-IN" dirty="0"/>
+              <a:t>Mean Shift Segmentation </a:t>
+            </a:r>
+          </a:p>
+        </p:txBody>
+      </p:sp>
+      <p:sp>
+        <p:nvSpPr>
+          <p:cNvPr id="3" name="Content Placeholder 2">
+            <a:extLst>
+              <a:ext uri="{FF2B5EF4-FFF2-40B4-BE49-F238E27FC236}">
+                <a16:creationId xmlns:a16="http://schemas.microsoft.com/office/drawing/2014/main" id="{5C8A5A1E-CD4B-729C-FE4E-3B97C6739872}"/>
+              </a:ext>
+            </a:extLst>
+          </p:cNvPr>
+          <p:cNvSpPr>
+            <a:spLocks noGrp="1"/>
+          </p:cNvSpPr>
+          <p:nvPr>
+            <p:ph idx="1"/>
+          </p:nvPr>
+        </p:nvSpPr>
+        <p:spPr/>
+        <p:txBody>
+          <a:bodyPr/>
+          <a:lstStyle/>
+          <a:p>
+            <a:r>
+              <a:rPr lang="en-US" dirty="0"/>
+              <a:t>Mean Shift is a clustering algorithm that finds dense regions (clusters) in data by iteratively shifting points toward the average (mean) of nearby points.’</a:t>
+            </a:r>
+          </a:p>
+          <a:p>
+            <a:r>
+              <a:rPr lang="en-US" dirty="0"/>
+              <a:t>Place a window (circle/sphere) over data points</a:t>
+            </a:r>
+          </a:p>
+          <a:p>
+            <a:r>
+              <a:rPr lang="en-US" dirty="0"/>
+              <a:t>Compute the mean of points inside the window</a:t>
+            </a:r>
+          </a:p>
+          <a:p>
+            <a:r>
+              <a:rPr lang="en-US" dirty="0"/>
+              <a:t>Move the window to that mean</a:t>
+            </a:r>
+          </a:p>
+          <a:p>
+            <a:r>
+              <a:rPr lang="en-US" dirty="0"/>
+              <a:t>Repeat until it stops moving</a:t>
+            </a:r>
+            <a:endParaRPr lang="en-IN" dirty="0"/>
+          </a:p>
+        </p:txBody>
+      </p:sp>
+    </p:spTree>
+    <p:extLst>
+      <p:ext uri="{BB962C8B-B14F-4D97-AF65-F5344CB8AC3E}">
+        <p14:creationId xmlns:p14="http://schemas.microsoft.com/office/powerpoint/2010/main" val="1087884576"/>
+      </p:ext>
+    </p:extLst>
+  </p:cSld>
+  <p:clrMapOvr>
+    <a:masterClrMapping/>
+  </p:clrMapOvr>
+</p:sld>
+</file>
+
+<file path=ppt/slides/slide19.xml><?xml version="1.0" encoding="utf-8"?>
+<p:sld xmlns:a="http://schemas.openxmlformats.org/drawingml/2006/main" xmlns:r="http://schemas.openxmlformats.org/officeDocument/2006/relationships" xmlns:p="http://schemas.openxmlformats.org/presentationml/2006/main">
+  <p:cSld>
+    <p:spTree>
+      <p:nvGrpSpPr>
+        <p:cNvPr id="1" name=""/>
+        <p:cNvGrpSpPr/>
+        <p:nvPr/>
+      </p:nvGrpSpPr>
+      <p:grpSpPr>
+        <a:xfrm>
+          <a:off x="0" y="0"/>
+          <a:ext cx="0" cy="0"/>
+          <a:chOff x="0" y="0"/>
+          <a:chExt cx="0" cy="0"/>
+        </a:xfrm>
+      </p:grpSpPr>
+      <p:sp>
+        <p:nvSpPr>
+          <p:cNvPr id="2" name="Title 1">
+            <a:extLst>
+              <a:ext uri="{FF2B5EF4-FFF2-40B4-BE49-F238E27FC236}">
+                <a16:creationId xmlns:a16="http://schemas.microsoft.com/office/drawing/2014/main" id="{64387544-6252-1469-6DB1-18E36AAACD1E}"/>
+              </a:ext>
+            </a:extLst>
+          </p:cNvPr>
+          <p:cNvSpPr>
+            <a:spLocks noGrp="1"/>
+          </p:cNvSpPr>
+          <p:nvPr>
+            <p:ph type="title"/>
+          </p:nvPr>
+        </p:nvSpPr>
+        <p:spPr/>
+        <p:txBody>
+          <a:bodyPr/>
+          <a:lstStyle/>
+          <a:p>
+            <a:endParaRPr lang="en-IN"/>
+          </a:p>
+        </p:txBody>
+      </p:sp>
+      <p:pic>
+        <p:nvPicPr>
+          <p:cNvPr id="5" name="Content Placeholder 4">
+            <a:extLst>
+              <a:ext uri="{FF2B5EF4-FFF2-40B4-BE49-F238E27FC236}">
+                <a16:creationId xmlns:a16="http://schemas.microsoft.com/office/drawing/2014/main" id="{9221D2EA-DCD6-5F35-C964-061AAED22B7F}"/>
+              </a:ext>
+            </a:extLst>
+          </p:cNvPr>
+          <p:cNvPicPr>
+            <a:picLocks noGrp="1" noChangeAspect="1"/>
+          </p:cNvPicPr>
+          <p:nvPr>
+            <p:ph idx="1"/>
+          </p:nvPr>
+        </p:nvPicPr>
+        <p:blipFill>
+          <a:blip r:embed="rId2">
+            <a:extLst>
+              <a:ext uri="{28A0092B-C50C-407E-A947-70E740481C1C}">
+                <a14:useLocalDpi xmlns:a14="http://schemas.microsoft.com/office/drawing/2010/main" val="0"/>
+              </a:ext>
+            </a:extLst>
+          </a:blip>
+          <a:stretch>
+            <a:fillRect/>
+          </a:stretch>
+        </p:blipFill>
+        <p:spPr>
+          <a:xfrm>
+            <a:off x="2351584" y="1844824"/>
+            <a:ext cx="7143750" cy="4238625"/>
+          </a:xfrm>
+          <a:prstGeom prst="rect">
+            <a:avLst/>
+          </a:prstGeom>
+        </p:spPr>
+      </p:pic>
+    </p:spTree>
+    <p:extLst>
+      <p:ext uri="{BB962C8B-B14F-4D97-AF65-F5344CB8AC3E}">
+        <p14:creationId xmlns:p14="http://schemas.microsoft.com/office/powerpoint/2010/main" val="2420268955"/>
+      </p:ext>
+    </p:extLst>
+  </p:cSld>
+  <p:clrMapOvr>
+    <a:masterClrMapping/>
+  </p:clrMapOvr>
+</p:sld>
+</file>
+
 <file path=ppt/slides/slide2.xml><?xml version="1.0" encoding="utf-8"?>
 <p:sld xmlns:a="http://schemas.openxmlformats.org/drawingml/2006/main" xmlns:r="http://schemas.openxmlformats.org/officeDocument/2006/relationships" xmlns:p="http://schemas.openxmlformats.org/presentationml/2006/main">
   <p:cSld>
@@ -5301,6 +6279,1497 @@
     <p:extLst>
       <p:ext uri="{BB962C8B-B14F-4D97-AF65-F5344CB8AC3E}">
         <p14:creationId xmlns:p14="http://schemas.microsoft.com/office/powerpoint/2010/main" val="594669628"/>
+      </p:ext>
+    </p:extLst>
+  </p:cSld>
+  <p:clrMapOvr>
+    <a:masterClrMapping/>
+  </p:clrMapOvr>
+</p:sld>
+</file>
+
+<file path=ppt/slides/slide20.xml><?xml version="1.0" encoding="utf-8"?>
+<p:sld xmlns:a="http://schemas.openxmlformats.org/drawingml/2006/main" xmlns:r="http://schemas.openxmlformats.org/officeDocument/2006/relationships" xmlns:p="http://schemas.openxmlformats.org/presentationml/2006/main">
+  <p:cSld>
+    <p:spTree>
+      <p:nvGrpSpPr>
+        <p:cNvPr id="1" name=""/>
+        <p:cNvGrpSpPr/>
+        <p:nvPr/>
+      </p:nvGrpSpPr>
+      <p:grpSpPr>
+        <a:xfrm>
+          <a:off x="0" y="0"/>
+          <a:ext cx="0" cy="0"/>
+          <a:chOff x="0" y="0"/>
+          <a:chExt cx="0" cy="0"/>
+        </a:xfrm>
+      </p:grpSpPr>
+      <p:sp>
+        <p:nvSpPr>
+          <p:cNvPr id="2" name="Title 1">
+            <a:extLst>
+              <a:ext uri="{FF2B5EF4-FFF2-40B4-BE49-F238E27FC236}">
+                <a16:creationId xmlns:a16="http://schemas.microsoft.com/office/drawing/2014/main" id="{2A6FF2CE-4656-AD55-4359-34537B5D6FC2}"/>
+              </a:ext>
+            </a:extLst>
+          </p:cNvPr>
+          <p:cNvSpPr>
+            <a:spLocks noGrp="1"/>
+          </p:cNvSpPr>
+          <p:nvPr>
+            <p:ph type="title"/>
+          </p:nvPr>
+        </p:nvSpPr>
+        <p:spPr/>
+        <p:txBody>
+          <a:bodyPr/>
+          <a:lstStyle/>
+          <a:p>
+            <a:r>
+              <a:rPr lang="en-IN" dirty="0"/>
+              <a:t>Algorithm</a:t>
+            </a:r>
+          </a:p>
+        </p:txBody>
+      </p:sp>
+      <p:sp>
+        <p:nvSpPr>
+          <p:cNvPr id="4" name="Rectangle 1">
+            <a:extLst>
+              <a:ext uri="{FF2B5EF4-FFF2-40B4-BE49-F238E27FC236}">
+                <a16:creationId xmlns:a16="http://schemas.microsoft.com/office/drawing/2014/main" id="{E92FE277-71FF-1C30-E2B8-0A34DF0F1252}"/>
+              </a:ext>
+            </a:extLst>
+          </p:cNvPr>
+          <p:cNvSpPr>
+            <a:spLocks noGrp="1" noChangeArrowheads="1"/>
+          </p:cNvSpPr>
+          <p:nvPr>
+            <p:ph idx="1"/>
+          </p:nvPr>
+        </p:nvSpPr>
+        <p:spPr bwMode="auto">
+          <a:xfrm>
+            <a:off x="1556810" y="2204864"/>
+            <a:ext cx="5827236" cy="2031325"/>
+          </a:xfrm>
+          <a:prstGeom prst="rect">
+            <a:avLst/>
+          </a:prstGeom>
+          <a:noFill/>
+          <a:ln>
+            <a:noFill/>
+          </a:ln>
+          <a:effectLst/>
+          <a:extLst>
+            <a:ext uri="{909E8E84-426E-40DD-AFC4-6F175D3DCCD1}">
+              <a14:hiddenFill xmlns:a14="http://schemas.microsoft.com/office/drawing/2010/main">
+                <a:solidFill>
+                  <a:schemeClr val="accent1"/>
+                </a:solidFill>
+              </a14:hiddenFill>
+            </a:ext>
+            <a:ext uri="{91240B29-F687-4F45-9708-019B960494DF}">
+              <a14:hiddenLine xmlns:a14="http://schemas.microsoft.com/office/drawing/2010/main" w="9525">
+                <a:solidFill>
+                  <a:schemeClr val="tx1"/>
+                </a:solidFill>
+                <a:miter lim="800000"/>
+                <a:headEnd/>
+                <a:tailEnd/>
+              </a14:hiddenLine>
+            </a:ext>
+            <a:ext uri="{AF507438-7753-43E0-B8FC-AC1667EBCBE1}">
+              <a14:hiddenEffects xmlns:a14="http://schemas.microsoft.com/office/drawing/2010/main">
+                <a:effectLst>
+                  <a:outerShdw dist="35921" dir="2700000" algn="ctr" rotWithShape="0">
+                    <a:schemeClr val="bg2"/>
+                  </a:outerShdw>
+                </a:effectLst>
+              </a14:hiddenEffects>
+            </a:ext>
+          </a:extLst>
+        </p:spPr>
+        <p:txBody>
+          <a:bodyPr vert="horz" wrap="none" lIns="91440" tIns="45720" rIns="91440" bIns="45720" numCol="1" anchor="ctr" anchorCtr="0" compatLnSpc="1">
+            <a:prstTxWarp prst="textNoShape">
+              <a:avLst/>
+            </a:prstTxWarp>
+            <a:spAutoFit/>
+          </a:bodyPr>
+          <a:lstStyle/>
+          <a:p>
+            <a:pPr marL="0" marR="0" lvl="0" indent="0" algn="l" defTabSz="914400" rtl="0" eaLnBrk="0" fontAlgn="base" latinLnBrk="0" hangingPunct="0">
+              <a:lnSpc>
+                <a:spcPct val="100000"/>
+              </a:lnSpc>
+              <a:spcBef>
+                <a:spcPct val="0"/>
+              </a:spcBef>
+              <a:spcAft>
+                <a:spcPct val="0"/>
+              </a:spcAft>
+              <a:buClrTx/>
+              <a:buSzTx/>
+              <a:buFontTx/>
+              <a:buNone/>
+              <a:tabLst/>
+            </a:pPr>
+            <a:endParaRPr kumimoji="0" lang="en-US" altLang="en-US" sz="1800" b="0" i="0" u="none" strike="noStrike" cap="none" normalizeH="0" baseline="0" dirty="0">
+              <a:ln>
+                <a:noFill/>
+              </a:ln>
+              <a:solidFill>
+                <a:schemeClr val="tx1"/>
+              </a:solidFill>
+              <a:effectLst/>
+              <a:latin typeface="Arial" panose="020B0604020202020204" pitchFamily="34" charset="0"/>
+            </a:endParaRPr>
+          </a:p>
+          <a:p>
+            <a:pPr eaLnBrk="0" fontAlgn="base" hangingPunct="0">
+              <a:lnSpc>
+                <a:spcPct val="100000"/>
+              </a:lnSpc>
+              <a:spcBef>
+                <a:spcPct val="0"/>
+              </a:spcBef>
+              <a:spcAft>
+                <a:spcPct val="0"/>
+              </a:spcAft>
+              <a:buClrTx/>
+            </a:pPr>
+            <a:r>
+              <a:rPr kumimoji="0" lang="en-US" altLang="en-US" sz="1800" b="0" i="0" u="none" strike="noStrike" cap="none" normalizeH="0" baseline="0" dirty="0">
+                <a:ln>
+                  <a:noFill/>
+                </a:ln>
+                <a:solidFill>
+                  <a:schemeClr val="tx1"/>
+                </a:solidFill>
+                <a:effectLst/>
+                <a:latin typeface="Arial" panose="020B0604020202020204" pitchFamily="34" charset="0"/>
+              </a:rPr>
+              <a:t>Pick a point x </a:t>
+            </a:r>
+          </a:p>
+          <a:p>
+            <a:pPr eaLnBrk="0" fontAlgn="base" hangingPunct="0">
+              <a:lnSpc>
+                <a:spcPct val="100000"/>
+              </a:lnSpc>
+              <a:spcBef>
+                <a:spcPct val="0"/>
+              </a:spcBef>
+              <a:spcAft>
+                <a:spcPct val="0"/>
+              </a:spcAft>
+              <a:buClrTx/>
+            </a:pPr>
+            <a:r>
+              <a:rPr kumimoji="0" lang="en-US" altLang="en-US" sz="1800" b="0" i="0" u="none" strike="noStrike" cap="none" normalizeH="0" baseline="0" dirty="0">
+                <a:ln>
+                  <a:noFill/>
+                </a:ln>
+                <a:solidFill>
+                  <a:schemeClr val="tx1"/>
+                </a:solidFill>
+                <a:effectLst/>
+                <a:latin typeface="Arial" panose="020B0604020202020204" pitchFamily="34" charset="0"/>
+              </a:rPr>
+              <a:t>Define a </a:t>
+            </a:r>
+            <a:r>
+              <a:rPr kumimoji="0" lang="en-US" altLang="en-US" sz="1800" b="1" i="0" u="none" strike="noStrike" cap="none" normalizeH="0" baseline="0" dirty="0">
+                <a:ln>
+                  <a:noFill/>
+                </a:ln>
+                <a:solidFill>
+                  <a:schemeClr val="tx1"/>
+                </a:solidFill>
+                <a:effectLst/>
+                <a:latin typeface="Arial" panose="020B0604020202020204" pitchFamily="34" charset="0"/>
+              </a:rPr>
+              <a:t>window (bandwidth h)</a:t>
+            </a:r>
+            <a:r>
+              <a:rPr kumimoji="0" lang="en-US" altLang="en-US" sz="1800" b="0" i="0" u="none" strike="noStrike" cap="none" normalizeH="0" baseline="0" dirty="0">
+                <a:ln>
+                  <a:noFill/>
+                </a:ln>
+                <a:solidFill>
+                  <a:schemeClr val="tx1"/>
+                </a:solidFill>
+                <a:effectLst/>
+                <a:latin typeface="Arial" panose="020B0604020202020204" pitchFamily="34" charset="0"/>
+              </a:rPr>
+              <a:t> </a:t>
+            </a:r>
+          </a:p>
+          <a:p>
+            <a:pPr eaLnBrk="0" fontAlgn="base" hangingPunct="0">
+              <a:lnSpc>
+                <a:spcPct val="100000"/>
+              </a:lnSpc>
+              <a:spcBef>
+                <a:spcPct val="0"/>
+              </a:spcBef>
+              <a:spcAft>
+                <a:spcPct val="0"/>
+              </a:spcAft>
+              <a:buClrTx/>
+            </a:pPr>
+            <a:r>
+              <a:rPr kumimoji="0" lang="en-US" altLang="en-US" sz="1800" b="0" i="0" u="none" strike="noStrike" cap="none" normalizeH="0" baseline="0" dirty="0">
+                <a:ln>
+                  <a:noFill/>
+                </a:ln>
+                <a:solidFill>
+                  <a:schemeClr val="tx1"/>
+                </a:solidFill>
+                <a:effectLst/>
+                <a:latin typeface="Arial" panose="020B0604020202020204" pitchFamily="34" charset="0"/>
+              </a:rPr>
+              <a:t>Compute mean of points inside window </a:t>
+            </a:r>
+          </a:p>
+          <a:p>
+            <a:pPr eaLnBrk="0" fontAlgn="base" hangingPunct="0">
+              <a:lnSpc>
+                <a:spcPct val="100000"/>
+              </a:lnSpc>
+              <a:spcBef>
+                <a:spcPct val="0"/>
+              </a:spcBef>
+              <a:spcAft>
+                <a:spcPct val="0"/>
+              </a:spcAft>
+              <a:buClrTx/>
+            </a:pPr>
+            <a:r>
+              <a:rPr kumimoji="0" lang="en-US" altLang="en-US" sz="1800" b="0" i="0" u="none" strike="noStrike" cap="none" normalizeH="0" baseline="0" dirty="0">
+                <a:ln>
+                  <a:noFill/>
+                </a:ln>
+                <a:solidFill>
+                  <a:schemeClr val="tx1"/>
+                </a:solidFill>
+                <a:effectLst/>
+                <a:latin typeface="Arial" panose="020B0604020202020204" pitchFamily="34" charset="0"/>
+              </a:rPr>
+              <a:t>Shift point to mean </a:t>
+            </a:r>
+          </a:p>
+          <a:p>
+            <a:pPr eaLnBrk="0" fontAlgn="base" hangingPunct="0">
+              <a:lnSpc>
+                <a:spcPct val="100000"/>
+              </a:lnSpc>
+              <a:spcBef>
+                <a:spcPct val="0"/>
+              </a:spcBef>
+              <a:spcAft>
+                <a:spcPct val="0"/>
+              </a:spcAft>
+              <a:buClrTx/>
+            </a:pPr>
+            <a:r>
+              <a:rPr kumimoji="0" lang="en-US" altLang="en-US" sz="1800" b="0" i="0" u="none" strike="noStrike" cap="none" normalizeH="0" baseline="0" dirty="0">
+                <a:ln>
+                  <a:noFill/>
+                </a:ln>
+                <a:solidFill>
+                  <a:schemeClr val="tx1"/>
+                </a:solidFill>
+                <a:effectLst/>
+                <a:latin typeface="Arial" panose="020B0604020202020204" pitchFamily="34" charset="0"/>
+              </a:rPr>
+              <a:t>Repeat until convergence </a:t>
+            </a:r>
+          </a:p>
+          <a:p>
+            <a:pPr eaLnBrk="0" fontAlgn="base" hangingPunct="0">
+              <a:lnSpc>
+                <a:spcPct val="100000"/>
+              </a:lnSpc>
+              <a:spcBef>
+                <a:spcPct val="0"/>
+              </a:spcBef>
+              <a:spcAft>
+                <a:spcPct val="0"/>
+              </a:spcAft>
+              <a:buClrTx/>
+            </a:pPr>
+            <a:r>
+              <a:rPr kumimoji="0" lang="en-US" altLang="en-US" sz="1800" b="0" i="0" u="none" strike="noStrike" cap="none" normalizeH="0" baseline="0" dirty="0">
+                <a:ln>
+                  <a:noFill/>
+                </a:ln>
+                <a:solidFill>
+                  <a:schemeClr val="tx1"/>
+                </a:solidFill>
+                <a:effectLst/>
+                <a:latin typeface="Arial" panose="020B0604020202020204" pitchFamily="34" charset="0"/>
+              </a:rPr>
+              <a:t>Points converging to same location → </a:t>
+            </a:r>
+            <a:r>
+              <a:rPr kumimoji="0" lang="en-US" altLang="en-US" sz="1800" b="1" i="0" u="none" strike="noStrike" cap="none" normalizeH="0" baseline="0" dirty="0">
+                <a:ln>
+                  <a:noFill/>
+                </a:ln>
+                <a:solidFill>
+                  <a:schemeClr val="tx1"/>
+                </a:solidFill>
+                <a:effectLst/>
+                <a:latin typeface="Arial" panose="020B0604020202020204" pitchFamily="34" charset="0"/>
+              </a:rPr>
+              <a:t>same cluster</a:t>
+            </a:r>
+            <a:r>
+              <a:rPr kumimoji="0" lang="en-US" altLang="en-US" sz="1800" b="0" i="0" u="none" strike="noStrike" cap="none" normalizeH="0" baseline="0" dirty="0">
+                <a:ln>
+                  <a:noFill/>
+                </a:ln>
+                <a:solidFill>
+                  <a:schemeClr val="tx1"/>
+                </a:solidFill>
+                <a:effectLst/>
+                <a:latin typeface="Arial" panose="020B0604020202020204" pitchFamily="34" charset="0"/>
+              </a:rPr>
+              <a:t> </a:t>
+            </a:r>
+          </a:p>
+        </p:txBody>
+      </p:sp>
+    </p:spTree>
+    <p:extLst>
+      <p:ext uri="{BB962C8B-B14F-4D97-AF65-F5344CB8AC3E}">
+        <p14:creationId xmlns:p14="http://schemas.microsoft.com/office/powerpoint/2010/main" val="2119577182"/>
+      </p:ext>
+    </p:extLst>
+  </p:cSld>
+  <p:clrMapOvr>
+    <a:masterClrMapping/>
+  </p:clrMapOvr>
+</p:sld>
+</file>
+
+<file path=ppt/slides/slide21.xml><?xml version="1.0" encoding="utf-8"?>
+<p:sld xmlns:a="http://schemas.openxmlformats.org/drawingml/2006/main" xmlns:r="http://schemas.openxmlformats.org/officeDocument/2006/relationships" xmlns:p="http://schemas.openxmlformats.org/presentationml/2006/main">
+  <p:cSld>
+    <p:spTree>
+      <p:nvGrpSpPr>
+        <p:cNvPr id="1" name=""/>
+        <p:cNvGrpSpPr/>
+        <p:nvPr/>
+      </p:nvGrpSpPr>
+      <p:grpSpPr>
+        <a:xfrm>
+          <a:off x="0" y="0"/>
+          <a:ext cx="0" cy="0"/>
+          <a:chOff x="0" y="0"/>
+          <a:chExt cx="0" cy="0"/>
+        </a:xfrm>
+      </p:grpSpPr>
+      <p:sp>
+        <p:nvSpPr>
+          <p:cNvPr id="2" name="Title 1">
+            <a:extLst>
+              <a:ext uri="{FF2B5EF4-FFF2-40B4-BE49-F238E27FC236}">
+                <a16:creationId xmlns:a16="http://schemas.microsoft.com/office/drawing/2014/main" id="{BB360A33-38A0-0F0B-5B52-FB720FA168D9}"/>
+              </a:ext>
+            </a:extLst>
+          </p:cNvPr>
+          <p:cNvSpPr>
+            <a:spLocks noGrp="1"/>
+          </p:cNvSpPr>
+          <p:nvPr>
+            <p:ph type="title"/>
+          </p:nvPr>
+        </p:nvSpPr>
+        <p:spPr/>
+        <p:txBody>
+          <a:bodyPr/>
+          <a:lstStyle/>
+          <a:p>
+            <a:r>
+              <a:rPr lang="en-IN" dirty="0"/>
+              <a:t>MRFS</a:t>
+            </a:r>
+          </a:p>
+        </p:txBody>
+      </p:sp>
+      <p:sp>
+        <p:nvSpPr>
+          <p:cNvPr id="3" name="Content Placeholder 2">
+            <a:extLst>
+              <a:ext uri="{FF2B5EF4-FFF2-40B4-BE49-F238E27FC236}">
+                <a16:creationId xmlns:a16="http://schemas.microsoft.com/office/drawing/2014/main" id="{C1621476-20FD-0943-852E-82553BD89B30}"/>
+              </a:ext>
+            </a:extLst>
+          </p:cNvPr>
+          <p:cNvSpPr>
+            <a:spLocks noGrp="1"/>
+          </p:cNvSpPr>
+          <p:nvPr>
+            <p:ph idx="1"/>
+          </p:nvPr>
+        </p:nvSpPr>
+        <p:spPr/>
+        <p:txBody>
+          <a:bodyPr/>
+          <a:lstStyle/>
+          <a:p>
+            <a:r>
+              <a:rPr lang="en-US" dirty="0"/>
+              <a:t>A </a:t>
+            </a:r>
+            <a:r>
+              <a:rPr lang="en-US" b="1" dirty="0"/>
+              <a:t>Markov Random Field (MRF)</a:t>
+            </a:r>
+            <a:r>
+              <a:rPr lang="en-US" dirty="0"/>
+              <a:t> is a model that says: </a:t>
+            </a:r>
+            <a:r>
+              <a:rPr lang="en-US" b="1" dirty="0"/>
+              <a:t>“A pixel’s label depends on its neighbors.”</a:t>
+            </a:r>
+            <a:endParaRPr lang="en-US" dirty="0"/>
+          </a:p>
+          <a:p>
+            <a:r>
+              <a:rPr lang="en-US" dirty="0"/>
+              <a:t>In images:</a:t>
+            </a:r>
+          </a:p>
+          <a:p>
+            <a:pPr lvl="1"/>
+            <a:r>
+              <a:rPr lang="en-US" dirty="0"/>
+              <a:t>Pixels are </a:t>
+            </a:r>
+            <a:r>
+              <a:rPr lang="en-US" b="1" dirty="0"/>
+              <a:t>not independent</a:t>
+            </a:r>
+            <a:r>
+              <a:rPr lang="en-US" dirty="0"/>
+              <a:t> </a:t>
+            </a:r>
+          </a:p>
+          <a:p>
+            <a:pPr lvl="1"/>
+            <a:r>
+              <a:rPr lang="en-US" dirty="0"/>
+              <a:t>Nearby pixels usually belong to the </a:t>
+            </a:r>
+            <a:r>
+              <a:rPr lang="en-US" b="1" dirty="0"/>
+              <a:t>same region/object</a:t>
+            </a:r>
+            <a:endParaRPr lang="en-US" dirty="0"/>
+          </a:p>
+          <a:p>
+            <a:endParaRPr lang="en-IN" dirty="0"/>
+          </a:p>
+        </p:txBody>
+      </p:sp>
+    </p:spTree>
+    <p:extLst>
+      <p:ext uri="{BB962C8B-B14F-4D97-AF65-F5344CB8AC3E}">
+        <p14:creationId xmlns:p14="http://schemas.microsoft.com/office/powerpoint/2010/main" val="283056959"/>
+      </p:ext>
+    </p:extLst>
+  </p:cSld>
+  <p:clrMapOvr>
+    <a:masterClrMapping/>
+  </p:clrMapOvr>
+</p:sld>
+</file>
+
+<file path=ppt/slides/slide22.xml><?xml version="1.0" encoding="utf-8"?>
+<p:sld xmlns:a="http://schemas.openxmlformats.org/drawingml/2006/main" xmlns:r="http://schemas.openxmlformats.org/officeDocument/2006/relationships" xmlns:p="http://schemas.openxmlformats.org/presentationml/2006/main">
+  <p:cSld>
+    <p:spTree>
+      <p:nvGrpSpPr>
+        <p:cNvPr id="1" name=""/>
+        <p:cNvGrpSpPr/>
+        <p:nvPr/>
+      </p:nvGrpSpPr>
+      <p:grpSpPr>
+        <a:xfrm>
+          <a:off x="0" y="0"/>
+          <a:ext cx="0" cy="0"/>
+          <a:chOff x="0" y="0"/>
+          <a:chExt cx="0" cy="0"/>
+        </a:xfrm>
+      </p:grpSpPr>
+      <p:sp>
+        <p:nvSpPr>
+          <p:cNvPr id="2" name="Title 1">
+            <a:extLst>
+              <a:ext uri="{FF2B5EF4-FFF2-40B4-BE49-F238E27FC236}">
+                <a16:creationId xmlns:a16="http://schemas.microsoft.com/office/drawing/2014/main" id="{A96B843F-6C49-D2A8-CE8E-680937589CE3}"/>
+              </a:ext>
+            </a:extLst>
+          </p:cNvPr>
+          <p:cNvSpPr>
+            <a:spLocks noGrp="1"/>
+          </p:cNvSpPr>
+          <p:nvPr>
+            <p:ph type="title"/>
+          </p:nvPr>
+        </p:nvSpPr>
+        <p:spPr/>
+        <p:txBody>
+          <a:bodyPr/>
+          <a:lstStyle/>
+          <a:p>
+            <a:r>
+              <a:rPr lang="en-IN" dirty="0"/>
+              <a:t>Intuition </a:t>
+            </a:r>
+          </a:p>
+        </p:txBody>
+      </p:sp>
+      <p:sp>
+        <p:nvSpPr>
+          <p:cNvPr id="3" name="Content Placeholder 2">
+            <a:extLst>
+              <a:ext uri="{FF2B5EF4-FFF2-40B4-BE49-F238E27FC236}">
+                <a16:creationId xmlns:a16="http://schemas.microsoft.com/office/drawing/2014/main" id="{250DB3C2-3C9A-F265-3E85-18736CE8FEA4}"/>
+              </a:ext>
+            </a:extLst>
+          </p:cNvPr>
+          <p:cNvSpPr>
+            <a:spLocks noGrp="1"/>
+          </p:cNvSpPr>
+          <p:nvPr>
+            <p:ph idx="1"/>
+          </p:nvPr>
+        </p:nvSpPr>
+        <p:spPr/>
+        <p:txBody>
+          <a:bodyPr/>
+          <a:lstStyle/>
+          <a:p>
+            <a:r>
+              <a:rPr lang="en-US" dirty="0"/>
+              <a:t>Think of an image like a grid:</a:t>
+            </a:r>
+          </a:p>
+          <a:p>
+            <a:pPr lvl="1"/>
+            <a:r>
+              <a:rPr lang="en-US" dirty="0"/>
+              <a:t>Each pixel = a </a:t>
+            </a:r>
+            <a:r>
+              <a:rPr lang="en-US" b="1" dirty="0"/>
+              <a:t>node</a:t>
+            </a:r>
+            <a:r>
+              <a:rPr lang="en-US" dirty="0"/>
+              <a:t> </a:t>
+            </a:r>
+          </a:p>
+          <a:p>
+            <a:pPr lvl="1"/>
+            <a:r>
+              <a:rPr lang="en-US" dirty="0"/>
+              <a:t>Neighboring pixels = </a:t>
+            </a:r>
+            <a:r>
+              <a:rPr lang="en-US" b="1" dirty="0"/>
+              <a:t>connected</a:t>
+            </a:r>
+            <a:r>
+              <a:rPr lang="en-US" dirty="0"/>
+              <a:t> </a:t>
+            </a:r>
+          </a:p>
+          <a:p>
+            <a:pPr lvl="1"/>
+            <a:r>
+              <a:rPr lang="en-US" dirty="0"/>
+              <a:t>Labels = object classes (background, cell, edge, etc.) </a:t>
+            </a:r>
+          </a:p>
+          <a:p>
+            <a:r>
+              <a:rPr lang="en-US" dirty="0"/>
+              <a:t> If most neighbors are “cell”, this pixel is likely also “cell”</a:t>
+            </a:r>
+          </a:p>
+          <a:p>
+            <a:endParaRPr lang="en-IN" dirty="0"/>
+          </a:p>
+        </p:txBody>
+      </p:sp>
+    </p:spTree>
+    <p:extLst>
+      <p:ext uri="{BB962C8B-B14F-4D97-AF65-F5344CB8AC3E}">
+        <p14:creationId xmlns:p14="http://schemas.microsoft.com/office/powerpoint/2010/main" val="2070728618"/>
+      </p:ext>
+    </p:extLst>
+  </p:cSld>
+  <p:clrMapOvr>
+    <a:masterClrMapping/>
+  </p:clrMapOvr>
+</p:sld>
+</file>
+
+<file path=ppt/slides/slide23.xml><?xml version="1.0" encoding="utf-8"?>
+<p:sld xmlns:a="http://schemas.openxmlformats.org/drawingml/2006/main" xmlns:r="http://schemas.openxmlformats.org/officeDocument/2006/relationships" xmlns:p="http://schemas.openxmlformats.org/presentationml/2006/main">
+  <p:cSld>
+    <p:spTree>
+      <p:nvGrpSpPr>
+        <p:cNvPr id="1" name=""/>
+        <p:cNvGrpSpPr/>
+        <p:nvPr/>
+      </p:nvGrpSpPr>
+      <p:grpSpPr>
+        <a:xfrm>
+          <a:off x="0" y="0"/>
+          <a:ext cx="0" cy="0"/>
+          <a:chOff x="0" y="0"/>
+          <a:chExt cx="0" cy="0"/>
+        </a:xfrm>
+      </p:grpSpPr>
+      <p:sp>
+        <p:nvSpPr>
+          <p:cNvPr id="2" name="Title 1">
+            <a:extLst>
+              <a:ext uri="{FF2B5EF4-FFF2-40B4-BE49-F238E27FC236}">
+                <a16:creationId xmlns:a16="http://schemas.microsoft.com/office/drawing/2014/main" id="{45D29756-7069-3A0D-CD48-5AC5486CE440}"/>
+              </a:ext>
+            </a:extLst>
+          </p:cNvPr>
+          <p:cNvSpPr>
+            <a:spLocks noGrp="1"/>
+          </p:cNvSpPr>
+          <p:nvPr>
+            <p:ph type="title"/>
+          </p:nvPr>
+        </p:nvSpPr>
+        <p:spPr/>
+        <p:txBody>
+          <a:bodyPr/>
+          <a:lstStyle/>
+          <a:p>
+            <a:endParaRPr lang="en-IN" dirty="0"/>
+          </a:p>
+        </p:txBody>
+      </p:sp>
+      <p:sp>
+        <p:nvSpPr>
+          <p:cNvPr id="3" name="Content Placeholder 2">
+            <a:extLst>
+              <a:ext uri="{FF2B5EF4-FFF2-40B4-BE49-F238E27FC236}">
+                <a16:creationId xmlns:a16="http://schemas.microsoft.com/office/drawing/2014/main" id="{BE94E244-615A-D103-E350-E14E69085CF8}"/>
+              </a:ext>
+            </a:extLst>
+          </p:cNvPr>
+          <p:cNvSpPr>
+            <a:spLocks noGrp="1"/>
+          </p:cNvSpPr>
+          <p:nvPr>
+            <p:ph idx="1"/>
+          </p:nvPr>
+        </p:nvSpPr>
+        <p:spPr/>
+        <p:txBody>
+          <a:bodyPr/>
+          <a:lstStyle/>
+          <a:p>
+            <a:r>
+              <a:rPr lang="en-US" dirty="0"/>
+              <a:t>Start with initial labels(from thresholding / Mean Shift)</a:t>
+            </a:r>
+          </a:p>
+          <a:p>
+            <a:r>
+              <a:rPr lang="en-US" dirty="0"/>
+              <a:t>Define neighborhood system(4-neighbor or 8-neighbor)</a:t>
+            </a:r>
+          </a:p>
+          <a:p>
+            <a:r>
+              <a:rPr lang="en-US" dirty="0"/>
+              <a:t>Compute energy</a:t>
+            </a:r>
+          </a:p>
+          <a:p>
+            <a:r>
+              <a:rPr lang="en-US" dirty="0"/>
+              <a:t>Update labels to reduce energy</a:t>
+            </a:r>
+          </a:p>
+          <a:p>
+            <a:r>
+              <a:rPr lang="en-US" dirty="0"/>
+              <a:t>Repeat until stable</a:t>
+            </a:r>
+            <a:endParaRPr lang="en-IN" dirty="0"/>
+          </a:p>
+        </p:txBody>
+      </p:sp>
+    </p:spTree>
+    <p:extLst>
+      <p:ext uri="{BB962C8B-B14F-4D97-AF65-F5344CB8AC3E}">
+        <p14:creationId xmlns:p14="http://schemas.microsoft.com/office/powerpoint/2010/main" val="2650464343"/>
+      </p:ext>
+    </p:extLst>
+  </p:cSld>
+  <p:clrMapOvr>
+    <a:masterClrMapping/>
+  </p:clrMapOvr>
+</p:sld>
+</file>
+
+<file path=ppt/slides/slide24.xml><?xml version="1.0" encoding="utf-8"?>
+<p:sld xmlns:a="http://schemas.openxmlformats.org/drawingml/2006/main" xmlns:r="http://schemas.openxmlformats.org/officeDocument/2006/relationships" xmlns:p="http://schemas.openxmlformats.org/presentationml/2006/main">
+  <p:cSld>
+    <p:spTree>
+      <p:nvGrpSpPr>
+        <p:cNvPr id="1" name=""/>
+        <p:cNvGrpSpPr/>
+        <p:nvPr/>
+      </p:nvGrpSpPr>
+      <p:grpSpPr>
+        <a:xfrm>
+          <a:off x="0" y="0"/>
+          <a:ext cx="0" cy="0"/>
+          <a:chOff x="0" y="0"/>
+          <a:chExt cx="0" cy="0"/>
+        </a:xfrm>
+      </p:grpSpPr>
+      <p:sp>
+        <p:nvSpPr>
+          <p:cNvPr id="2" name="Title 1">
+            <a:extLst>
+              <a:ext uri="{FF2B5EF4-FFF2-40B4-BE49-F238E27FC236}">
+                <a16:creationId xmlns:a16="http://schemas.microsoft.com/office/drawing/2014/main" id="{705EFBB2-1FB0-B733-6D67-897B42921C2B}"/>
+              </a:ext>
+            </a:extLst>
+          </p:cNvPr>
+          <p:cNvSpPr>
+            <a:spLocks noGrp="1"/>
+          </p:cNvSpPr>
+          <p:nvPr>
+            <p:ph type="title"/>
+          </p:nvPr>
+        </p:nvSpPr>
+        <p:spPr/>
+        <p:txBody>
+          <a:bodyPr/>
+          <a:lstStyle/>
+          <a:p>
+            <a:r>
+              <a:rPr lang="en-IN" dirty="0"/>
+              <a:t>Advantages</a:t>
+            </a:r>
+          </a:p>
+        </p:txBody>
+      </p:sp>
+      <p:sp>
+        <p:nvSpPr>
+          <p:cNvPr id="3" name="Content Placeholder 2">
+            <a:extLst>
+              <a:ext uri="{FF2B5EF4-FFF2-40B4-BE49-F238E27FC236}">
+                <a16:creationId xmlns:a16="http://schemas.microsoft.com/office/drawing/2014/main" id="{E5838B1E-BA5B-4733-7236-FB5B56CB8E2A}"/>
+              </a:ext>
+            </a:extLst>
+          </p:cNvPr>
+          <p:cNvSpPr>
+            <a:spLocks noGrp="1"/>
+          </p:cNvSpPr>
+          <p:nvPr>
+            <p:ph idx="1"/>
+          </p:nvPr>
+        </p:nvSpPr>
+        <p:spPr/>
+        <p:txBody>
+          <a:bodyPr/>
+          <a:lstStyle/>
+          <a:p>
+            <a:pPr marL="0" indent="0">
+              <a:buNone/>
+            </a:pPr>
+            <a:r>
+              <a:rPr lang="en-US" b="1" dirty="0"/>
+              <a:t>✅ Removes noise</a:t>
+            </a:r>
+          </a:p>
+          <a:p>
+            <a:pPr marL="0" indent="0">
+              <a:buNone/>
+            </a:pPr>
+            <a:r>
+              <a:rPr lang="en-US" b="1" dirty="0"/>
+              <a:t>✅ Enforces spatial consistency</a:t>
+            </a:r>
+          </a:p>
+          <a:p>
+            <a:pPr marL="0" indent="0">
+              <a:buNone/>
+            </a:pPr>
+            <a:r>
+              <a:rPr lang="en-US" b="1" dirty="0"/>
+              <a:t>✅ Produces smooth regions</a:t>
+            </a:r>
+          </a:p>
+          <a:p>
+            <a:pPr marL="0" indent="0">
+              <a:buNone/>
+            </a:pPr>
+            <a:r>
+              <a:rPr lang="en-US" b="1" dirty="0"/>
+              <a:t>✅ Works well with segmentation outputs</a:t>
+            </a:r>
+          </a:p>
+          <a:p>
+            <a:endParaRPr lang="en-IN" dirty="0"/>
+          </a:p>
+        </p:txBody>
+      </p:sp>
+    </p:spTree>
+    <p:extLst>
+      <p:ext uri="{BB962C8B-B14F-4D97-AF65-F5344CB8AC3E}">
+        <p14:creationId xmlns:p14="http://schemas.microsoft.com/office/powerpoint/2010/main" val="3677258984"/>
+      </p:ext>
+    </p:extLst>
+  </p:cSld>
+  <p:clrMapOvr>
+    <a:masterClrMapping/>
+  </p:clrMapOvr>
+</p:sld>
+</file>
+
+<file path=ppt/slides/slide25.xml><?xml version="1.0" encoding="utf-8"?>
+<p:sld xmlns:a="http://schemas.openxmlformats.org/drawingml/2006/main" xmlns:r="http://schemas.openxmlformats.org/officeDocument/2006/relationships" xmlns:p="http://schemas.openxmlformats.org/presentationml/2006/main">
+  <p:cSld>
+    <p:spTree>
+      <p:nvGrpSpPr>
+        <p:cNvPr id="1" name=""/>
+        <p:cNvGrpSpPr/>
+        <p:nvPr/>
+      </p:nvGrpSpPr>
+      <p:grpSpPr>
+        <a:xfrm>
+          <a:off x="0" y="0"/>
+          <a:ext cx="0" cy="0"/>
+          <a:chOff x="0" y="0"/>
+          <a:chExt cx="0" cy="0"/>
+        </a:xfrm>
+      </p:grpSpPr>
+      <p:sp>
+        <p:nvSpPr>
+          <p:cNvPr id="2" name="Title 1">
+            <a:extLst>
+              <a:ext uri="{FF2B5EF4-FFF2-40B4-BE49-F238E27FC236}">
+                <a16:creationId xmlns:a16="http://schemas.microsoft.com/office/drawing/2014/main" id="{2CD53F6F-3E6C-F997-7BFB-565B22A35E9D}"/>
+              </a:ext>
+            </a:extLst>
+          </p:cNvPr>
+          <p:cNvSpPr>
+            <a:spLocks noGrp="1"/>
+          </p:cNvSpPr>
+          <p:nvPr>
+            <p:ph type="title"/>
+          </p:nvPr>
+        </p:nvSpPr>
+        <p:spPr/>
+        <p:txBody>
+          <a:bodyPr/>
+          <a:lstStyle/>
+          <a:p>
+            <a:r>
+              <a:rPr lang="en-IN" dirty="0"/>
+              <a:t>Texture Segmentation</a:t>
+            </a:r>
+          </a:p>
+        </p:txBody>
+      </p:sp>
+      <p:sp>
+        <p:nvSpPr>
+          <p:cNvPr id="3" name="Content Placeholder 2">
+            <a:extLst>
+              <a:ext uri="{FF2B5EF4-FFF2-40B4-BE49-F238E27FC236}">
+                <a16:creationId xmlns:a16="http://schemas.microsoft.com/office/drawing/2014/main" id="{F1B81B9C-A72A-CB9A-A758-435A3D8D0438}"/>
+              </a:ext>
+            </a:extLst>
+          </p:cNvPr>
+          <p:cNvSpPr>
+            <a:spLocks noGrp="1"/>
+          </p:cNvSpPr>
+          <p:nvPr>
+            <p:ph idx="1"/>
+          </p:nvPr>
+        </p:nvSpPr>
+        <p:spPr/>
+        <p:txBody>
+          <a:bodyPr/>
+          <a:lstStyle/>
+          <a:p>
+            <a:r>
+              <a:rPr lang="en-US" b="1" dirty="0"/>
+              <a:t>Texture segmentation</a:t>
+            </a:r>
+            <a:r>
+              <a:rPr lang="en-US" dirty="0"/>
+              <a:t> means dividing an image into regions based on </a:t>
+            </a:r>
+            <a:r>
+              <a:rPr lang="en-US" b="1" dirty="0"/>
+              <a:t>repeating patterns</a:t>
+            </a:r>
+            <a:r>
+              <a:rPr lang="en-US" dirty="0"/>
+              <a:t>, not just color.</a:t>
+            </a:r>
+          </a:p>
+          <a:p>
+            <a:r>
+              <a:rPr lang="en-IN" dirty="0"/>
+              <a:t>Why Texture Matters</a:t>
+            </a:r>
+          </a:p>
+          <a:p>
+            <a:pPr lvl="1"/>
+            <a:r>
+              <a:rPr lang="en-IN" dirty="0"/>
+              <a:t>Two regions may have:</a:t>
+            </a:r>
+          </a:p>
+          <a:p>
+            <a:pPr lvl="1"/>
+            <a:r>
+              <a:rPr lang="en-IN" dirty="0"/>
+              <a:t>Same </a:t>
+            </a:r>
+            <a:r>
+              <a:rPr lang="en-IN" dirty="0" err="1"/>
+              <a:t>color</a:t>
+            </a:r>
+            <a:r>
+              <a:rPr lang="en-IN" dirty="0"/>
+              <a:t> </a:t>
+            </a:r>
+          </a:p>
+          <a:p>
+            <a:pPr lvl="1"/>
+            <a:r>
+              <a:rPr lang="en-IN" dirty="0"/>
+              <a:t>Different texture </a:t>
+            </a:r>
+          </a:p>
+          <a:p>
+            <a:pPr lvl="1"/>
+            <a:r>
+              <a:rPr lang="en-IN" dirty="0"/>
+              <a:t>✅Example:  Grass vs green cloth</a:t>
+            </a:r>
+          </a:p>
+        </p:txBody>
+      </p:sp>
+    </p:spTree>
+    <p:extLst>
+      <p:ext uri="{BB962C8B-B14F-4D97-AF65-F5344CB8AC3E}">
+        <p14:creationId xmlns:p14="http://schemas.microsoft.com/office/powerpoint/2010/main" val="4100169812"/>
+      </p:ext>
+    </p:extLst>
+  </p:cSld>
+  <p:clrMapOvr>
+    <a:masterClrMapping/>
+  </p:clrMapOvr>
+</p:sld>
+</file>
+
+<file path=ppt/slides/slide26.xml><?xml version="1.0" encoding="utf-8"?>
+<p:sld xmlns:a="http://schemas.openxmlformats.org/drawingml/2006/main" xmlns:r="http://schemas.openxmlformats.org/officeDocument/2006/relationships" xmlns:p="http://schemas.openxmlformats.org/presentationml/2006/main">
+  <p:cSld>
+    <p:spTree>
+      <p:nvGrpSpPr>
+        <p:cNvPr id="1" name=""/>
+        <p:cNvGrpSpPr/>
+        <p:nvPr/>
+      </p:nvGrpSpPr>
+      <p:grpSpPr>
+        <a:xfrm>
+          <a:off x="0" y="0"/>
+          <a:ext cx="0" cy="0"/>
+          <a:chOff x="0" y="0"/>
+          <a:chExt cx="0" cy="0"/>
+        </a:xfrm>
+      </p:grpSpPr>
+      <p:sp>
+        <p:nvSpPr>
+          <p:cNvPr id="2" name="Title 1">
+            <a:extLst>
+              <a:ext uri="{FF2B5EF4-FFF2-40B4-BE49-F238E27FC236}">
+                <a16:creationId xmlns:a16="http://schemas.microsoft.com/office/drawing/2014/main" id="{1BEEA1E9-0E0E-20EE-318E-810D419CC7CF}"/>
+              </a:ext>
+            </a:extLst>
+          </p:cNvPr>
+          <p:cNvSpPr>
+            <a:spLocks noGrp="1"/>
+          </p:cNvSpPr>
+          <p:nvPr>
+            <p:ph type="title"/>
+          </p:nvPr>
+        </p:nvSpPr>
+        <p:spPr/>
+        <p:txBody>
+          <a:bodyPr/>
+          <a:lstStyle/>
+          <a:p>
+            <a:r>
+              <a:rPr lang="en-IN" dirty="0"/>
+              <a:t>How Texture is represented</a:t>
+            </a:r>
+          </a:p>
+        </p:txBody>
+      </p:sp>
+      <p:sp>
+        <p:nvSpPr>
+          <p:cNvPr id="3" name="Content Placeholder 2">
+            <a:extLst>
+              <a:ext uri="{FF2B5EF4-FFF2-40B4-BE49-F238E27FC236}">
+                <a16:creationId xmlns:a16="http://schemas.microsoft.com/office/drawing/2014/main" id="{5C70136C-148E-71E9-53E4-124785C5AD78}"/>
+              </a:ext>
+            </a:extLst>
+          </p:cNvPr>
+          <p:cNvSpPr>
+            <a:spLocks noGrp="1"/>
+          </p:cNvSpPr>
+          <p:nvPr>
+            <p:ph idx="1"/>
+          </p:nvPr>
+        </p:nvSpPr>
+        <p:spPr/>
+        <p:txBody>
+          <a:bodyPr>
+            <a:normAutofit lnSpcReduction="10000"/>
+          </a:bodyPr>
+          <a:lstStyle/>
+          <a:p>
+            <a:r>
+              <a:rPr lang="en-IN" dirty="0"/>
+              <a:t>Texture is described using </a:t>
+            </a:r>
+            <a:r>
+              <a:rPr lang="en-IN" b="1" dirty="0"/>
+              <a:t>features</a:t>
+            </a:r>
+            <a:r>
+              <a:rPr lang="en-IN" dirty="0"/>
+              <a:t>:</a:t>
+            </a:r>
+          </a:p>
+          <a:p>
+            <a:pPr marL="0" indent="0">
+              <a:buNone/>
+            </a:pPr>
+            <a:r>
+              <a:rPr lang="en-IN" b="1" dirty="0"/>
+              <a:t>1. Statistical Features</a:t>
+            </a:r>
+          </a:p>
+          <a:p>
+            <a:r>
+              <a:rPr lang="en-IN" dirty="0"/>
+              <a:t>Mean, variance </a:t>
+            </a:r>
+          </a:p>
+          <a:p>
+            <a:r>
+              <a:rPr lang="en-IN" dirty="0"/>
+              <a:t>Gray-Level Co-occurrence Matrix (GLCM) </a:t>
+            </a:r>
+          </a:p>
+          <a:p>
+            <a:pPr marL="0" indent="0">
+              <a:buNone/>
+            </a:pPr>
+            <a:r>
+              <a:rPr lang="en-IN" dirty="0"/>
+              <a:t>👉 Captures intensity relationships</a:t>
+            </a:r>
+          </a:p>
+          <a:p>
+            <a:pPr marL="0" indent="0">
+              <a:buNone/>
+            </a:pPr>
+            <a:r>
+              <a:rPr lang="en-IN" b="1" dirty="0"/>
+              <a:t>2. Filter-Based Features</a:t>
+            </a:r>
+          </a:p>
+          <a:p>
+            <a:r>
+              <a:rPr lang="en-IN" dirty="0"/>
+              <a:t>Gabor filters </a:t>
+            </a:r>
+          </a:p>
+          <a:p>
+            <a:r>
+              <a:rPr lang="en-IN" dirty="0"/>
+              <a:t>Wavelets </a:t>
+            </a:r>
+          </a:p>
+          <a:p>
+            <a:pPr marL="0" indent="0">
+              <a:buNone/>
+            </a:pPr>
+            <a:r>
+              <a:rPr lang="en-IN" dirty="0"/>
+              <a:t>👉 Detect patterns at different scales &amp; orientations</a:t>
+            </a:r>
+          </a:p>
+          <a:p>
+            <a:endParaRPr lang="en-IN" dirty="0"/>
+          </a:p>
+        </p:txBody>
+      </p:sp>
+    </p:spTree>
+    <p:extLst>
+      <p:ext uri="{BB962C8B-B14F-4D97-AF65-F5344CB8AC3E}">
+        <p14:creationId xmlns:p14="http://schemas.microsoft.com/office/powerpoint/2010/main" val="4021420609"/>
+      </p:ext>
+    </p:extLst>
+  </p:cSld>
+  <p:clrMapOvr>
+    <a:masterClrMapping/>
+  </p:clrMapOvr>
+</p:sld>
+</file>
+
+<file path=ppt/slides/slide27.xml><?xml version="1.0" encoding="utf-8"?>
+<p:sld xmlns:a="http://schemas.openxmlformats.org/drawingml/2006/main" xmlns:r="http://schemas.openxmlformats.org/officeDocument/2006/relationships" xmlns:p="http://schemas.openxmlformats.org/presentationml/2006/main">
+  <p:cSld>
+    <p:spTree>
+      <p:nvGrpSpPr>
+        <p:cNvPr id="1" name=""/>
+        <p:cNvGrpSpPr/>
+        <p:nvPr/>
+      </p:nvGrpSpPr>
+      <p:grpSpPr>
+        <a:xfrm>
+          <a:off x="0" y="0"/>
+          <a:ext cx="0" cy="0"/>
+          <a:chOff x="0" y="0"/>
+          <a:chExt cx="0" cy="0"/>
+        </a:xfrm>
+      </p:grpSpPr>
+      <p:sp>
+        <p:nvSpPr>
+          <p:cNvPr id="2" name="Title 1">
+            <a:extLst>
+              <a:ext uri="{FF2B5EF4-FFF2-40B4-BE49-F238E27FC236}">
+                <a16:creationId xmlns:a16="http://schemas.microsoft.com/office/drawing/2014/main" id="{E1AC2A4E-4BB7-6549-0425-02FB91A34C75}"/>
+              </a:ext>
+            </a:extLst>
+          </p:cNvPr>
+          <p:cNvSpPr>
+            <a:spLocks noGrp="1"/>
+          </p:cNvSpPr>
+          <p:nvPr>
+            <p:ph type="title"/>
+          </p:nvPr>
+        </p:nvSpPr>
+        <p:spPr/>
+        <p:txBody>
+          <a:bodyPr/>
+          <a:lstStyle/>
+          <a:p>
+            <a:endParaRPr lang="en-IN"/>
+          </a:p>
+        </p:txBody>
+      </p:sp>
+      <p:sp>
+        <p:nvSpPr>
+          <p:cNvPr id="3" name="Content Placeholder 2">
+            <a:extLst>
+              <a:ext uri="{FF2B5EF4-FFF2-40B4-BE49-F238E27FC236}">
+                <a16:creationId xmlns:a16="http://schemas.microsoft.com/office/drawing/2014/main" id="{B8A7BE36-88CC-E146-9F21-EE74052FFCE4}"/>
+              </a:ext>
+            </a:extLst>
+          </p:cNvPr>
+          <p:cNvSpPr>
+            <a:spLocks noGrp="1"/>
+          </p:cNvSpPr>
+          <p:nvPr>
+            <p:ph idx="1"/>
+          </p:nvPr>
+        </p:nvSpPr>
+        <p:spPr/>
+        <p:txBody>
+          <a:bodyPr/>
+          <a:lstStyle/>
+          <a:p>
+            <a:pPr marL="0" indent="0">
+              <a:buNone/>
+            </a:pPr>
+            <a:r>
+              <a:rPr lang="en-US" b="1" dirty="0"/>
+              <a:t>3. Local Binary Patterns (LBP)</a:t>
+            </a:r>
+          </a:p>
+          <a:p>
+            <a:r>
+              <a:rPr lang="en-US" dirty="0"/>
+              <a:t>Encodes local neighborhood structure </a:t>
+            </a:r>
+          </a:p>
+          <a:p>
+            <a:pPr marL="0" indent="0">
+              <a:buNone/>
+            </a:pPr>
+            <a:r>
+              <a:rPr lang="en-US" dirty="0"/>
+              <a:t>👉 Very popular for:</a:t>
+            </a:r>
+          </a:p>
+          <a:p>
+            <a:r>
+              <a:rPr lang="en-US" dirty="0"/>
+              <a:t>Face recognition </a:t>
+            </a:r>
+          </a:p>
+          <a:p>
+            <a:r>
+              <a:rPr lang="en-US" dirty="0"/>
+              <a:t>Medical imaging </a:t>
+            </a:r>
+          </a:p>
+          <a:p>
+            <a:endParaRPr lang="en-IN" dirty="0"/>
+          </a:p>
+        </p:txBody>
+      </p:sp>
+    </p:spTree>
+    <p:extLst>
+      <p:ext uri="{BB962C8B-B14F-4D97-AF65-F5344CB8AC3E}">
+        <p14:creationId xmlns:p14="http://schemas.microsoft.com/office/powerpoint/2010/main" val="286696084"/>
+      </p:ext>
+    </p:extLst>
+  </p:cSld>
+  <p:clrMapOvr>
+    <a:masterClrMapping/>
+  </p:clrMapOvr>
+</p:sld>
+</file>
+
+<file path=ppt/slides/slide28.xml><?xml version="1.0" encoding="utf-8"?>
+<p:sld xmlns:a="http://schemas.openxmlformats.org/drawingml/2006/main" xmlns:r="http://schemas.openxmlformats.org/officeDocument/2006/relationships" xmlns:p="http://schemas.openxmlformats.org/presentationml/2006/main">
+  <p:cSld>
+    <p:spTree>
+      <p:nvGrpSpPr>
+        <p:cNvPr id="1" name=""/>
+        <p:cNvGrpSpPr/>
+        <p:nvPr/>
+      </p:nvGrpSpPr>
+      <p:grpSpPr>
+        <a:xfrm>
+          <a:off x="0" y="0"/>
+          <a:ext cx="0" cy="0"/>
+          <a:chOff x="0" y="0"/>
+          <a:chExt cx="0" cy="0"/>
+        </a:xfrm>
+      </p:grpSpPr>
+      <p:sp>
+        <p:nvSpPr>
+          <p:cNvPr id="2" name="Title 1">
+            <a:extLst>
+              <a:ext uri="{FF2B5EF4-FFF2-40B4-BE49-F238E27FC236}">
+                <a16:creationId xmlns:a16="http://schemas.microsoft.com/office/drawing/2014/main" id="{83DB5BD1-1411-90C0-8FB5-E50CDCD364C1}"/>
+              </a:ext>
+            </a:extLst>
+          </p:cNvPr>
+          <p:cNvSpPr>
+            <a:spLocks noGrp="1"/>
+          </p:cNvSpPr>
+          <p:nvPr>
+            <p:ph type="title"/>
+          </p:nvPr>
+        </p:nvSpPr>
+        <p:spPr/>
+        <p:txBody>
+          <a:bodyPr/>
+          <a:lstStyle/>
+          <a:p>
+            <a:r>
+              <a:rPr lang="en-IN" dirty="0"/>
+              <a:t>Texture segmentation pipeline</a:t>
+            </a:r>
+          </a:p>
+        </p:txBody>
+      </p:sp>
+      <p:sp>
+        <p:nvSpPr>
+          <p:cNvPr id="3" name="Content Placeholder 2">
+            <a:extLst>
+              <a:ext uri="{FF2B5EF4-FFF2-40B4-BE49-F238E27FC236}">
+                <a16:creationId xmlns:a16="http://schemas.microsoft.com/office/drawing/2014/main" id="{474D743B-8762-760A-DC8A-CC8B33C3B929}"/>
+              </a:ext>
+            </a:extLst>
+          </p:cNvPr>
+          <p:cNvSpPr>
+            <a:spLocks noGrp="1"/>
+          </p:cNvSpPr>
+          <p:nvPr>
+            <p:ph idx="1"/>
+          </p:nvPr>
+        </p:nvSpPr>
+        <p:spPr/>
+        <p:txBody>
+          <a:bodyPr/>
+          <a:lstStyle/>
+          <a:p>
+            <a:r>
+              <a:rPr lang="en-IN" dirty="0"/>
+              <a:t>Input Image</a:t>
+            </a:r>
+          </a:p>
+          <a:p>
+            <a:r>
+              <a:rPr lang="en-IN" dirty="0"/>
+              <a:t>Apply texture operators (Gabor / LBP / GLCM)</a:t>
+            </a:r>
+          </a:p>
+          <a:p>
+            <a:r>
+              <a:rPr lang="en-IN" dirty="0"/>
+              <a:t>Generate feature map</a:t>
+            </a:r>
+          </a:p>
+          <a:p>
+            <a:r>
+              <a:rPr lang="en-IN" dirty="0"/>
+              <a:t>Cluster pixels (K-means / Mean Shift)</a:t>
+            </a:r>
+          </a:p>
+          <a:p>
+            <a:r>
+              <a:rPr lang="en-IN" dirty="0"/>
+              <a:t>Label regions</a:t>
+            </a:r>
+          </a:p>
+        </p:txBody>
+      </p:sp>
+    </p:spTree>
+    <p:extLst>
+      <p:ext uri="{BB962C8B-B14F-4D97-AF65-F5344CB8AC3E}">
+        <p14:creationId xmlns:p14="http://schemas.microsoft.com/office/powerpoint/2010/main" val="2931515236"/>
+      </p:ext>
+    </p:extLst>
+  </p:cSld>
+  <p:clrMapOvr>
+    <a:masterClrMapping/>
+  </p:clrMapOvr>
+</p:sld>
+</file>
+
+<file path=ppt/slides/slide29.xml><?xml version="1.0" encoding="utf-8"?>
+<p:sld xmlns:a="http://schemas.openxmlformats.org/drawingml/2006/main" xmlns:r="http://schemas.openxmlformats.org/officeDocument/2006/relationships" xmlns:p="http://schemas.openxmlformats.org/presentationml/2006/main">
+  <p:cSld>
+    <p:spTree>
+      <p:nvGrpSpPr>
+        <p:cNvPr id="1" name=""/>
+        <p:cNvGrpSpPr/>
+        <p:nvPr/>
+      </p:nvGrpSpPr>
+      <p:grpSpPr>
+        <a:xfrm>
+          <a:off x="0" y="0"/>
+          <a:ext cx="0" cy="0"/>
+          <a:chOff x="0" y="0"/>
+          <a:chExt cx="0" cy="0"/>
+        </a:xfrm>
+      </p:grpSpPr>
+      <p:sp>
+        <p:nvSpPr>
+          <p:cNvPr id="2" name="Title 1">
+            <a:extLst>
+              <a:ext uri="{FF2B5EF4-FFF2-40B4-BE49-F238E27FC236}">
+                <a16:creationId xmlns:a16="http://schemas.microsoft.com/office/drawing/2014/main" id="{280BB1E5-E313-DF46-E19D-6E713CA5A8B7}"/>
+              </a:ext>
+            </a:extLst>
+          </p:cNvPr>
+          <p:cNvSpPr>
+            <a:spLocks noGrp="1"/>
+          </p:cNvSpPr>
+          <p:nvPr>
+            <p:ph type="title"/>
+          </p:nvPr>
+        </p:nvSpPr>
+        <p:spPr/>
+        <p:txBody>
+          <a:bodyPr/>
+          <a:lstStyle/>
+          <a:p>
+            <a:r>
+              <a:rPr lang="en-IN" dirty="0"/>
+              <a:t>Advantages</a:t>
+            </a:r>
+          </a:p>
+        </p:txBody>
+      </p:sp>
+      <p:sp>
+        <p:nvSpPr>
+          <p:cNvPr id="3" name="Content Placeholder 2">
+            <a:extLst>
+              <a:ext uri="{FF2B5EF4-FFF2-40B4-BE49-F238E27FC236}">
+                <a16:creationId xmlns:a16="http://schemas.microsoft.com/office/drawing/2014/main" id="{C2F6D37C-C770-8BF7-8C96-33C02C07A751}"/>
+              </a:ext>
+            </a:extLst>
+          </p:cNvPr>
+          <p:cNvSpPr>
+            <a:spLocks noGrp="1"/>
+          </p:cNvSpPr>
+          <p:nvPr>
+            <p:ph idx="1"/>
+          </p:nvPr>
+        </p:nvSpPr>
+        <p:spPr/>
+        <p:txBody>
+          <a:bodyPr/>
+          <a:lstStyle/>
+          <a:p>
+            <a:r>
+              <a:rPr lang="en-US" b="1" dirty="0"/>
+              <a:t>✅ Works when color fails</a:t>
+            </a:r>
+          </a:p>
+          <a:p>
+            <a:r>
+              <a:rPr lang="en-US" b="1" dirty="0"/>
+              <a:t>✅ Captures structural information</a:t>
+            </a:r>
+          </a:p>
+          <a:p>
+            <a:r>
+              <a:rPr lang="en-US" b="1" dirty="0"/>
+              <a:t>✅ Powerful for medical images</a:t>
+            </a:r>
+          </a:p>
+          <a:p>
+            <a:pPr marL="0" indent="0">
+              <a:buNone/>
+            </a:pPr>
+            <a:endParaRPr lang="en-IN" dirty="0"/>
+          </a:p>
+        </p:txBody>
+      </p:sp>
+    </p:spTree>
+    <p:extLst>
+      <p:ext uri="{BB962C8B-B14F-4D97-AF65-F5344CB8AC3E}">
+        <p14:creationId xmlns:p14="http://schemas.microsoft.com/office/powerpoint/2010/main" val="1669707946"/>
       </p:ext>
     </p:extLst>
   </p:cSld>
@@ -5454,6 +7923,386 @@
     <p:extLst>
       <p:ext uri="{BB962C8B-B14F-4D97-AF65-F5344CB8AC3E}">
         <p14:creationId xmlns:p14="http://schemas.microsoft.com/office/powerpoint/2010/main" val="3042826300"/>
+      </p:ext>
+    </p:extLst>
+  </p:cSld>
+  <p:clrMapOvr>
+    <a:masterClrMapping/>
+  </p:clrMapOvr>
+</p:sld>
+</file>
+
+<file path=ppt/slides/slide30.xml><?xml version="1.0" encoding="utf-8"?>
+<p:sld xmlns:a="http://schemas.openxmlformats.org/drawingml/2006/main" xmlns:r="http://schemas.openxmlformats.org/officeDocument/2006/relationships" xmlns:p="http://schemas.openxmlformats.org/presentationml/2006/main">
+  <p:cSld>
+    <p:spTree>
+      <p:nvGrpSpPr>
+        <p:cNvPr id="1" name=""/>
+        <p:cNvGrpSpPr/>
+        <p:nvPr/>
+      </p:nvGrpSpPr>
+      <p:grpSpPr>
+        <a:xfrm>
+          <a:off x="0" y="0"/>
+          <a:ext cx="0" cy="0"/>
+          <a:chOff x="0" y="0"/>
+          <a:chExt cx="0" cy="0"/>
+        </a:xfrm>
+      </p:grpSpPr>
+      <p:sp>
+        <p:nvSpPr>
+          <p:cNvPr id="2" name="Title 1">
+            <a:extLst>
+              <a:ext uri="{FF2B5EF4-FFF2-40B4-BE49-F238E27FC236}">
+                <a16:creationId xmlns:a16="http://schemas.microsoft.com/office/drawing/2014/main" id="{819192B4-A39A-E6E9-5CD8-483342032EBF}"/>
+              </a:ext>
+            </a:extLst>
+          </p:cNvPr>
+          <p:cNvSpPr>
+            <a:spLocks noGrp="1"/>
+          </p:cNvSpPr>
+          <p:nvPr>
+            <p:ph type="title"/>
+          </p:nvPr>
+        </p:nvSpPr>
+        <p:spPr/>
+        <p:txBody>
+          <a:bodyPr/>
+          <a:lstStyle/>
+          <a:p>
+            <a:r>
+              <a:rPr lang="en-IN" dirty="0"/>
+              <a:t>Object Detection</a:t>
+            </a:r>
+          </a:p>
+        </p:txBody>
+      </p:sp>
+      <p:sp>
+        <p:nvSpPr>
+          <p:cNvPr id="3" name="Content Placeholder 2">
+            <a:extLst>
+              <a:ext uri="{FF2B5EF4-FFF2-40B4-BE49-F238E27FC236}">
+                <a16:creationId xmlns:a16="http://schemas.microsoft.com/office/drawing/2014/main" id="{798004AE-970F-DCBB-641F-5906E010BAB2}"/>
+              </a:ext>
+            </a:extLst>
+          </p:cNvPr>
+          <p:cNvSpPr>
+            <a:spLocks noGrp="1"/>
+          </p:cNvSpPr>
+          <p:nvPr>
+            <p:ph idx="1"/>
+          </p:nvPr>
+        </p:nvSpPr>
+        <p:spPr/>
+        <p:txBody>
+          <a:bodyPr/>
+          <a:lstStyle/>
+          <a:p>
+            <a:r>
+              <a:rPr lang="en-US" b="1" dirty="0"/>
+              <a:t>Object Detection</a:t>
+            </a:r>
+            <a:r>
+              <a:rPr lang="en-US" dirty="0"/>
+              <a:t> is the task of:  </a:t>
+            </a:r>
+            <a:r>
+              <a:rPr lang="en-US" b="1" dirty="0"/>
+              <a:t>Finding objects + identifying what they are + locating them</a:t>
+            </a:r>
+            <a:endParaRPr lang="en-US" dirty="0"/>
+          </a:p>
+          <a:p>
+            <a:r>
+              <a:rPr lang="en-US" dirty="0"/>
+              <a:t>So for each object, we get:</a:t>
+            </a:r>
+          </a:p>
+          <a:p>
+            <a:r>
+              <a:rPr lang="en-US" dirty="0"/>
+              <a:t> Bounding box (location) </a:t>
+            </a:r>
+          </a:p>
+          <a:p>
+            <a:r>
+              <a:rPr lang="en-US" dirty="0"/>
+              <a:t>Label (what it is) </a:t>
+            </a:r>
+          </a:p>
+          <a:p>
+            <a:r>
+              <a:rPr lang="en-US" dirty="0"/>
+              <a:t>Confidence score </a:t>
+            </a:r>
+          </a:p>
+          <a:p>
+            <a:endParaRPr lang="en-IN" dirty="0"/>
+          </a:p>
+        </p:txBody>
+      </p:sp>
+      <p:pic>
+        <p:nvPicPr>
+          <p:cNvPr id="5" name="Picture 4">
+            <a:extLst>
+              <a:ext uri="{FF2B5EF4-FFF2-40B4-BE49-F238E27FC236}">
+                <a16:creationId xmlns:a16="http://schemas.microsoft.com/office/drawing/2014/main" id="{FEF0C242-602F-8FF2-FCA8-29383D70815E}"/>
+              </a:ext>
+            </a:extLst>
+          </p:cNvPr>
+          <p:cNvPicPr>
+            <a:picLocks noChangeAspect="1"/>
+          </p:cNvPicPr>
+          <p:nvPr/>
+        </p:nvPicPr>
+        <p:blipFill>
+          <a:blip r:embed="rId2">
+            <a:extLst>
+              <a:ext uri="{28A0092B-C50C-407E-A947-70E740481C1C}">
+                <a14:useLocalDpi xmlns:a14="http://schemas.microsoft.com/office/drawing/2010/main" val="0"/>
+              </a:ext>
+            </a:extLst>
+          </a:blip>
+          <a:stretch>
+            <a:fillRect/>
+          </a:stretch>
+        </p:blipFill>
+        <p:spPr>
+          <a:xfrm>
+            <a:off x="6125725" y="2636912"/>
+            <a:ext cx="4762500" cy="3571875"/>
+          </a:xfrm>
+          <a:prstGeom prst="rect">
+            <a:avLst/>
+          </a:prstGeom>
+        </p:spPr>
+      </p:pic>
+    </p:spTree>
+    <p:extLst>
+      <p:ext uri="{BB962C8B-B14F-4D97-AF65-F5344CB8AC3E}">
+        <p14:creationId xmlns:p14="http://schemas.microsoft.com/office/powerpoint/2010/main" val="3088297614"/>
+      </p:ext>
+    </p:extLst>
+  </p:cSld>
+  <p:clrMapOvr>
+    <a:masterClrMapping/>
+  </p:clrMapOvr>
+</p:sld>
+</file>
+
+<file path=ppt/slides/slide31.xml><?xml version="1.0" encoding="utf-8"?>
+<p:sld xmlns:a="http://schemas.openxmlformats.org/drawingml/2006/main" xmlns:r="http://schemas.openxmlformats.org/officeDocument/2006/relationships" xmlns:p="http://schemas.openxmlformats.org/presentationml/2006/main">
+  <p:cSld>
+    <p:spTree>
+      <p:nvGrpSpPr>
+        <p:cNvPr id="1" name=""/>
+        <p:cNvGrpSpPr/>
+        <p:nvPr/>
+      </p:nvGrpSpPr>
+      <p:grpSpPr>
+        <a:xfrm>
+          <a:off x="0" y="0"/>
+          <a:ext cx="0" cy="0"/>
+          <a:chOff x="0" y="0"/>
+          <a:chExt cx="0" cy="0"/>
+        </a:xfrm>
+      </p:grpSpPr>
+      <p:sp>
+        <p:nvSpPr>
+          <p:cNvPr id="2" name="Title 1">
+            <a:extLst>
+              <a:ext uri="{FF2B5EF4-FFF2-40B4-BE49-F238E27FC236}">
+                <a16:creationId xmlns:a16="http://schemas.microsoft.com/office/drawing/2014/main" id="{6E2DF518-6355-D24D-1013-393358631850}"/>
+              </a:ext>
+            </a:extLst>
+          </p:cNvPr>
+          <p:cNvSpPr>
+            <a:spLocks noGrp="1"/>
+          </p:cNvSpPr>
+          <p:nvPr>
+            <p:ph type="title"/>
+          </p:nvPr>
+        </p:nvSpPr>
+        <p:spPr/>
+        <p:txBody>
+          <a:bodyPr/>
+          <a:lstStyle/>
+          <a:p>
+            <a:r>
+              <a:rPr lang="en-US" b="1" dirty="0"/>
+              <a:t>Difference from Classification</a:t>
+            </a:r>
+            <a:br>
+              <a:rPr lang="en-US" b="1" dirty="0"/>
+            </a:br>
+            <a:endParaRPr lang="en-IN" dirty="0"/>
+          </a:p>
+        </p:txBody>
+      </p:sp>
+      <p:sp>
+        <p:nvSpPr>
+          <p:cNvPr id="3" name="Content Placeholder 2">
+            <a:extLst>
+              <a:ext uri="{FF2B5EF4-FFF2-40B4-BE49-F238E27FC236}">
+                <a16:creationId xmlns:a16="http://schemas.microsoft.com/office/drawing/2014/main" id="{D76CF913-04CF-98A2-9DAA-44F238E9B7C7}"/>
+              </a:ext>
+            </a:extLst>
+          </p:cNvPr>
+          <p:cNvSpPr>
+            <a:spLocks noGrp="1"/>
+          </p:cNvSpPr>
+          <p:nvPr>
+            <p:ph idx="1"/>
+          </p:nvPr>
+        </p:nvSpPr>
+        <p:spPr/>
+        <p:txBody>
+          <a:bodyPr/>
+          <a:lstStyle/>
+          <a:p>
+            <a:r>
+              <a:rPr lang="en-US" b="1" dirty="0"/>
+              <a:t>Classification</a:t>
+            </a:r>
+            <a:r>
+              <a:rPr lang="en-US" dirty="0"/>
+              <a:t> → “What is in the image?” </a:t>
+            </a:r>
+          </a:p>
+          <a:p>
+            <a:r>
+              <a:rPr lang="en-US" b="1" dirty="0"/>
+              <a:t>Detection</a:t>
+            </a:r>
+            <a:r>
+              <a:rPr lang="en-US" dirty="0"/>
+              <a:t> → “What is in the image AND where?”</a:t>
+            </a:r>
+          </a:p>
+          <a:p>
+            <a:endParaRPr lang="en-IN" dirty="0"/>
+          </a:p>
+        </p:txBody>
+      </p:sp>
+    </p:spTree>
+    <p:extLst>
+      <p:ext uri="{BB962C8B-B14F-4D97-AF65-F5344CB8AC3E}">
+        <p14:creationId xmlns:p14="http://schemas.microsoft.com/office/powerpoint/2010/main" val="1786676198"/>
+      </p:ext>
+    </p:extLst>
+  </p:cSld>
+  <p:clrMapOvr>
+    <a:masterClrMapping/>
+  </p:clrMapOvr>
+</p:sld>
+</file>
+
+<file path=ppt/slides/slide32.xml><?xml version="1.0" encoding="utf-8"?>
+<p:sld xmlns:a="http://schemas.openxmlformats.org/drawingml/2006/main" xmlns:r="http://schemas.openxmlformats.org/officeDocument/2006/relationships" xmlns:p="http://schemas.openxmlformats.org/presentationml/2006/main">
+  <p:cSld>
+    <p:spTree>
+      <p:nvGrpSpPr>
+        <p:cNvPr id="1" name=""/>
+        <p:cNvGrpSpPr/>
+        <p:nvPr/>
+      </p:nvGrpSpPr>
+      <p:grpSpPr>
+        <a:xfrm>
+          <a:off x="0" y="0"/>
+          <a:ext cx="0" cy="0"/>
+          <a:chOff x="0" y="0"/>
+          <a:chExt cx="0" cy="0"/>
+        </a:xfrm>
+      </p:grpSpPr>
+      <p:sp>
+        <p:nvSpPr>
+          <p:cNvPr id="2" name="Title 1">
+            <a:extLst>
+              <a:ext uri="{FF2B5EF4-FFF2-40B4-BE49-F238E27FC236}">
+                <a16:creationId xmlns:a16="http://schemas.microsoft.com/office/drawing/2014/main" id="{C2A27FD5-496A-F766-C306-E1521B4FB74D}"/>
+              </a:ext>
+            </a:extLst>
+          </p:cNvPr>
+          <p:cNvSpPr>
+            <a:spLocks noGrp="1"/>
+          </p:cNvSpPr>
+          <p:nvPr>
+            <p:ph type="title"/>
+          </p:nvPr>
+        </p:nvSpPr>
+        <p:spPr/>
+        <p:txBody>
+          <a:bodyPr/>
+          <a:lstStyle/>
+          <a:p>
+            <a:r>
+              <a:rPr lang="en-IN" dirty="0"/>
+              <a:t>Pipeline</a:t>
+            </a:r>
+          </a:p>
+        </p:txBody>
+      </p:sp>
+      <p:sp>
+        <p:nvSpPr>
+          <p:cNvPr id="3" name="Content Placeholder 2">
+            <a:extLst>
+              <a:ext uri="{FF2B5EF4-FFF2-40B4-BE49-F238E27FC236}">
+                <a16:creationId xmlns:a16="http://schemas.microsoft.com/office/drawing/2014/main" id="{2AA97DCE-382E-C6CD-BEC9-195EC4AC1589}"/>
+              </a:ext>
+            </a:extLst>
+          </p:cNvPr>
+          <p:cNvSpPr>
+            <a:spLocks noGrp="1"/>
+          </p:cNvSpPr>
+          <p:nvPr>
+            <p:ph idx="1"/>
+          </p:nvPr>
+        </p:nvSpPr>
+        <p:spPr/>
+        <p:txBody>
+          <a:bodyPr/>
+          <a:lstStyle/>
+          <a:p>
+            <a:r>
+              <a:rPr lang="en-US" dirty="0"/>
+              <a:t>Input image</a:t>
+            </a:r>
+          </a:p>
+          <a:p>
+            <a:r>
+              <a:rPr lang="en-US" dirty="0"/>
+              <a:t>Detect regions of interest</a:t>
+            </a:r>
+          </a:p>
+          <a:p>
+            <a:r>
+              <a:rPr lang="en-US" dirty="0"/>
+              <a:t>Extract features</a:t>
+            </a:r>
+          </a:p>
+          <a:p>
+            <a:r>
+              <a:rPr lang="en-US" dirty="0"/>
+              <a:t>Classify each region</a:t>
+            </a:r>
+          </a:p>
+          <a:p>
+            <a:r>
+              <a:rPr lang="en-US"/>
+              <a:t>Draw </a:t>
+            </a:r>
+            <a:r>
+              <a:rPr lang="en-US" dirty="0"/>
+              <a:t>bounding boxes</a:t>
+            </a:r>
+            <a:endParaRPr lang="en-IN" dirty="0"/>
+          </a:p>
+        </p:txBody>
+      </p:sp>
+    </p:spTree>
+    <p:extLst>
+      <p:ext uri="{BB962C8B-B14F-4D97-AF65-F5344CB8AC3E}">
+        <p14:creationId xmlns:p14="http://schemas.microsoft.com/office/powerpoint/2010/main" val="2744390695"/>
       </p:ext>
     </p:extLst>
   </p:cSld>
@@ -6175,8 +9024,8 @@
           </a:p>
         </p:txBody>
       </p:sp>
-      <mc:AlternateContent xmlns:mc="http://schemas.openxmlformats.org/markup-compatibility/2006">
-        <mc:Choice xmlns:a14="http://schemas.microsoft.com/office/drawing/2010/main" Requires="a14">
+      <mc:AlternateContent xmlns:mc="http://schemas.openxmlformats.org/markup-compatibility/2006" xmlns:a14="http://schemas.microsoft.com/office/drawing/2010/main">
+        <mc:Choice Requires="a14">
           <p:sp>
             <p:nvSpPr>
               <p:cNvPr id="3" name="Content Placeholder 2">
@@ -6269,22 +9118,30 @@
                         <m:rPr>
                           <m:sty m:val="p"/>
                         </m:rPr>
-                        <a:rPr lang="en-IN"/>
+                        <a:rPr lang="en-IN">
+                          <a:latin typeface="Cambria Math" panose="02040503050406030204" pitchFamily="18" charset="0"/>
+                        </a:rPr>
                         <m:t>∇</m:t>
                       </m:r>
                       <m:r>
-                        <a:rPr lang="en-IN" i="1"/>
+                        <a:rPr lang="en-IN" i="1">
+                          <a:latin typeface="Cambria Math" panose="02040503050406030204" pitchFamily="18" charset="0"/>
+                        </a:rPr>
                         <m:t>𝐼</m:t>
                       </m:r>
                       <m:r>
-                        <a:rPr lang="en-IN"/>
+                        <a:rPr lang="en-IN">
+                          <a:latin typeface="Cambria Math" panose="02040503050406030204" pitchFamily="18" charset="0"/>
+                        </a:rPr>
                         <m:t>=</m:t>
                       </m:r>
                       <m:rad>
                         <m:radPr>
                           <m:degHide m:val="on"/>
                           <m:ctrlPr>
-                            <a:rPr lang="ar-AE" i="1"/>
+                            <a:rPr lang="ar-AE" i="1">
+                              <a:latin typeface="Cambria Math" panose="02040503050406030204" pitchFamily="18" charset="0"/>
+                            </a:rPr>
                           </m:ctrlPr>
                         </m:radPr>
                         <m:deg/>
@@ -6292,53 +9149,71 @@
                           <m:sSubSup>
                             <m:sSubSupPr>
                               <m:ctrlPr>
-                                <a:rPr lang="ar-AE" i="1"/>
+                                <a:rPr lang="ar-AE" i="1">
+                                  <a:latin typeface="Cambria Math" panose="02040503050406030204" pitchFamily="18" charset="0"/>
+                                </a:rPr>
                               </m:ctrlPr>
                             </m:sSubSupPr>
                             <m:e>
                               <m:r>
-                                <a:rPr lang="ar-AE" i="1"/>
+                                <a:rPr lang="ar-AE" i="1">
+                                  <a:latin typeface="Cambria Math" panose="02040503050406030204" pitchFamily="18" charset="0"/>
+                                </a:rPr>
                                 <m:t>𝐺</m:t>
                               </m:r>
                             </m:e>
                             <m:sub>
                               <m:r>
-                                <a:rPr lang="ar-AE" i="1"/>
+                                <a:rPr lang="ar-AE" i="1">
+                                  <a:latin typeface="Cambria Math" panose="02040503050406030204" pitchFamily="18" charset="0"/>
+                                </a:rPr>
                                 <m:t>𝑥</m:t>
                               </m:r>
                             </m:sub>
                             <m:sup>
                               <m:r>
-                                <a:rPr lang="ar-AE"/>
+                                <a:rPr lang="ar-AE">
+                                  <a:latin typeface="Cambria Math" panose="02040503050406030204" pitchFamily="18" charset="0"/>
+                                </a:rPr>
                                 <m:t>2</m:t>
                               </m:r>
                             </m:sup>
                           </m:sSubSup>
                           <m:r>
-                            <a:rPr lang="ar-AE"/>
+                            <a:rPr lang="ar-AE">
+                              <a:latin typeface="Cambria Math" panose="02040503050406030204" pitchFamily="18" charset="0"/>
+                            </a:rPr>
                             <m:t>+</m:t>
                           </m:r>
                           <m:sSubSup>
                             <m:sSubSupPr>
                               <m:ctrlPr>
-                                <a:rPr lang="ar-AE" i="1"/>
+                                <a:rPr lang="ar-AE" i="1">
+                                  <a:latin typeface="Cambria Math" panose="02040503050406030204" pitchFamily="18" charset="0"/>
+                                </a:rPr>
                               </m:ctrlPr>
                             </m:sSubSupPr>
                             <m:e>
                               <m:r>
-                                <a:rPr lang="ar-AE" i="1"/>
+                                <a:rPr lang="ar-AE" i="1">
+                                  <a:latin typeface="Cambria Math" panose="02040503050406030204" pitchFamily="18" charset="0"/>
+                                </a:rPr>
                                 <m:t>𝐺</m:t>
                               </m:r>
                             </m:e>
                             <m:sub>
                               <m:r>
-                                <a:rPr lang="ar-AE" i="1"/>
+                                <a:rPr lang="ar-AE" i="1">
+                                  <a:latin typeface="Cambria Math" panose="02040503050406030204" pitchFamily="18" charset="0"/>
+                                </a:rPr>
                                 <m:t>𝑦</m:t>
                               </m:r>
                             </m:sub>
                             <m:sup>
                               <m:r>
-                                <a:rPr lang="ar-AE"/>
+                                <a:rPr lang="ar-AE">
+                                  <a:latin typeface="Cambria Math" panose="02040503050406030204" pitchFamily="18" charset="0"/>
+                                </a:rPr>
                                 <m:t>2</m:t>
                               </m:r>
                             </m:sup>
@@ -6368,7 +9243,7 @@
             </p:txBody>
           </p:sp>
         </mc:Choice>
-        <mc:Fallback>
+        <mc:Fallback xmlns="">
           <p:sp>
             <p:nvSpPr>
               <p:cNvPr id="3" name="Content Placeholder 2">
